--- a/day-4-office-scripts-power-automate/day-4-office-scripts-power-automate.pptx
+++ b/day-4-office-scripts-power-automate/day-4-office-scripts-power-automate.pptx
@@ -5,29 +5,28 @@
     <p:sldMasterId id="2147483648" r:id="rId1"/>
   </p:sldMasterIdLst>
   <p:notesMasterIdLst>
-    <p:notesMasterId r:id="rId12"/>
+    <p:notesMasterId r:id="rId11"/>
   </p:notesMasterIdLst>
   <p:sldIdLst>
     <p:sldId id="256" r:id="rId2"/>
-    <p:sldId id="455" r:id="rId3"/>
-    <p:sldId id="474" r:id="rId4"/>
-    <p:sldId id="471" r:id="rId5"/>
-    <p:sldId id="475" r:id="rId6"/>
-    <p:sldId id="476" r:id="rId7"/>
-    <p:sldId id="472" r:id="rId8"/>
-    <p:sldId id="473" r:id="rId9"/>
-    <p:sldId id="415" r:id="rId10"/>
-    <p:sldId id="470" r:id="rId11"/>
+    <p:sldId id="474" r:id="rId3"/>
+    <p:sldId id="471" r:id="rId4"/>
+    <p:sldId id="475" r:id="rId5"/>
+    <p:sldId id="476" r:id="rId6"/>
+    <p:sldId id="472" r:id="rId7"/>
+    <p:sldId id="473" r:id="rId8"/>
+    <p:sldId id="415" r:id="rId9"/>
+    <p:sldId id="470" r:id="rId10"/>
   </p:sldIdLst>
   <p:sldSz cx="18288000" cy="10287000"/>
   <p:notesSz cx="6858000" cy="9144000"/>
   <p:embeddedFontLst>
     <p:embeddedFont>
       <p:font typeface="Consolas" panose="020B0609020204030204" pitchFamily="49" charset="0"/>
-      <p:regular r:id="rId13"/>
-      <p:bold r:id="rId14"/>
-      <p:italic r:id="rId15"/>
-      <p:boldItalic r:id="rId16"/>
+      <p:regular r:id="rId12"/>
+      <p:bold r:id="rId13"/>
+      <p:italic r:id="rId14"/>
+      <p:boldItalic r:id="rId15"/>
     </p:embeddedFont>
   </p:embeddedFontLst>
   <p:defaultTextStyle>
@@ -253,7 +252,7 @@
           <a:p>
             <a:fld id="{17A98A70-FA8C-4354-959C-C70678AC9BCF}" type="datetimeFigureOut">
               <a:rPr lang="en-US" smtClean="0"/>
-              <a:t>12/1/2025</a:t>
+              <a:t>4/8/2026</a:t>
             </a:fld>
             <a:endParaRPr lang="en-US"/>
           </a:p>
@@ -544,6 +543,86 @@
             <a:spLocks noGrp="1" noRot="1" noChangeAspect="1"/>
           </p:cNvSpPr>
           <p:nvPr>
+            <p:ph type="sldImg" idx="2"/>
+          </p:nvPr>
+        </p:nvSpPr>
+        <p:spPr/>
+      </p:sp>
+      <p:sp>
+        <p:nvSpPr>
+          <p:cNvPr id="3" name="Notes Placeholder 2"/>
+          <p:cNvSpPr>
+            <a:spLocks noGrp="1"/>
+          </p:cNvSpPr>
+          <p:nvPr>
+            <p:ph type="body" sz="quarter" idx="3"/>
+          </p:nvPr>
+        </p:nvSpPr>
+        <p:spPr/>
+        <p:txBody>
+          <a:bodyPr/>
+          <a:lstStyle/>
+          <a:p>
+            <a:r>
+              <a:t>Welcome to Day 4. This is the day Excel stops being a place you go and starts being a process that runs without you.</a:t>
+            </a:r>
+          </a:p>
+          <a:p>
+            <a:r>
+              <a:t>Yesterday we made Excel intelligent — Copilot, Python, Agent Mode. But intelligence without execution is just expensive thinking. Today we're closing that gap. Office Scripts capture the steps you take inside Excel; Power Automate runs those steps on triggers — schedules, file uploads, email arrivals, form submissions, you name it.</a:t>
+            </a:r>
+          </a:p>
+          <a:p>
+            <a:r>
+              <a:t>The other big focus today is what's new in Power Automate itself: it now has serious AI baked in. Copilot inside the flow designer can build flows from a sentence of plain English. AI Builder actions can extract, classify, summarize, and prompt right inside a flow. By the end of the hour you'll see how to combine an Office Script with an AI prompt action and a Teams notification — and that pattern alone will save most of you hours every week.</a:t>
+            </a:r>
+          </a:p>
+        </p:txBody>
+      </p:sp>
+      <p:sp>
+        <p:nvSpPr>
+          <p:cNvPr id="4" name="Slide Number Placeholder 3"/>
+          <p:cNvSpPr>
+            <a:spLocks noGrp="1"/>
+          </p:cNvSpPr>
+          <p:nvPr>
+            <p:ph type="sldNum" sz="quarter" idx="5"/>
+          </p:nvPr>
+        </p:nvSpPr>
+        <p:spPr/>
+      </p:sp>
+    </p:spTree>
+  </p:cSld>
+  <p:clrMapOvr>
+    <a:masterClrMapping/>
+  </p:clrMapOvr>
+</p:notes>
+</file>
+
+<file path=ppt/notesSlides/notesSlide2.xml><?xml version="1.0" encoding="utf-8"?>
+<p:notes xmlns:a="http://schemas.openxmlformats.org/drawingml/2006/main" xmlns:r="http://schemas.openxmlformats.org/officeDocument/2006/relationships" xmlns:p="http://schemas.openxmlformats.org/presentationml/2006/main">
+  <p:cSld>
+    <p:spTree>
+      <p:nvGrpSpPr>
+        <p:cNvPr id="1" name=""/>
+        <p:cNvGrpSpPr/>
+        <p:nvPr/>
+      </p:nvGrpSpPr>
+      <p:grpSpPr>
+        <a:xfrm>
+          <a:off x="0" y="0"/>
+          <a:ext cx="0" cy="0"/>
+          <a:chOff x="0" y="0"/>
+          <a:chExt cx="0" cy="0"/>
+        </a:xfrm>
+      </p:grpSpPr>
+      <p:sp>
+        <p:nvSpPr>
+          <p:cNvPr id="2" name="Slide Image Placeholder 1"/>
+          <p:cNvSpPr>
+            <a:spLocks noGrp="1" noRot="1" noChangeAspect="1"/>
+          </p:cNvSpPr>
+          <p:nvPr>
             <p:ph type="sldImg"/>
           </p:nvPr>
         </p:nvSpPr>
@@ -597,7 +676,7 @@
           <a:p>
             <a:fld id="{FFB500C5-13F7-48FC-8160-C29AECF6C602}" type="slidenum">
               <a:rPr lang="en-US" smtClean="0"/>
-              <a:t>3</a:t>
+              <a:t>2</a:t>
             </a:fld>
             <a:endParaRPr lang="en-US"/>
           </a:p>
@@ -616,7 +695,87 @@
 </p:notes>
 </file>
 
-<file path=ppt/notesSlides/notesSlide2.xml><?xml version="1.0" encoding="utf-8"?>
+<file path=ppt/notesSlides/notesSlide3.xml><?xml version="1.0" encoding="utf-8"?>
+<p:notes xmlns:a="http://schemas.openxmlformats.org/drawingml/2006/main" xmlns:r="http://schemas.openxmlformats.org/officeDocument/2006/relationships" xmlns:p="http://schemas.openxmlformats.org/presentationml/2006/main">
+  <p:cSld>
+    <p:spTree>
+      <p:nvGrpSpPr>
+        <p:cNvPr id="1" name=""/>
+        <p:cNvGrpSpPr/>
+        <p:nvPr/>
+      </p:nvGrpSpPr>
+      <p:grpSpPr>
+        <a:xfrm>
+          <a:off x="0" y="0"/>
+          <a:ext cx="0" cy="0"/>
+          <a:chOff x="0" y="0"/>
+          <a:chExt cx="0" cy="0"/>
+        </a:xfrm>
+      </p:grpSpPr>
+      <p:sp>
+        <p:nvSpPr>
+          <p:cNvPr id="2" name="Slide Image Placeholder 1"/>
+          <p:cNvSpPr>
+            <a:spLocks noGrp="1" noRot="1" noChangeAspect="1"/>
+          </p:cNvSpPr>
+          <p:nvPr>
+            <p:ph type="sldImg" idx="2"/>
+          </p:nvPr>
+        </p:nvSpPr>
+        <p:spPr/>
+      </p:sp>
+      <p:sp>
+        <p:nvSpPr>
+          <p:cNvPr id="3" name="Notes Placeholder 2"/>
+          <p:cNvSpPr>
+            <a:spLocks noGrp="1"/>
+          </p:cNvSpPr>
+          <p:nvPr>
+            <p:ph type="body" sz="quarter" idx="3"/>
+          </p:nvPr>
+        </p:nvSpPr>
+        <p:spPr/>
+        <p:txBody>
+          <a:bodyPr/>
+          <a:lstStyle/>
+          <a:p>
+            <a:r>
+              <a:t>Same stack, climbing one more rung. Foundation, preparation, intelligence, execution, orchestration. We're now at execution. This is the layer that takes everything we built earlier in the week and makes it run on its own.</a:t>
+            </a:r>
+          </a:p>
+          <a:p>
+            <a:r>
+              <a:t>Office Scripts capture the steps inside Excel. Power Automate runs them outside Excel. Together, they're how analysts stop being the bottleneck. You build the logic once, and the system runs it forever.</a:t>
+            </a:r>
+          </a:p>
+          <a:p>
+            <a:r>
+              <a:t>And critically — Power Automate is increasingly an AI tool in its own right. Not just "trigger something, do something, end something." Modern flows can read documents, extract structured data, generate text, classify content, and call out to AI prompt actions in the middle of a process. We'll see all of that today.</a:t>
+            </a:r>
+          </a:p>
+        </p:txBody>
+      </p:sp>
+      <p:sp>
+        <p:nvSpPr>
+          <p:cNvPr id="4" name="Slide Number Placeholder 3"/>
+          <p:cNvSpPr>
+            <a:spLocks noGrp="1"/>
+          </p:cNvSpPr>
+          <p:nvPr>
+            <p:ph type="sldNum" sz="quarter" idx="5"/>
+          </p:nvPr>
+        </p:nvSpPr>
+        <p:spPr/>
+      </p:sp>
+    </p:spTree>
+  </p:cSld>
+  <p:clrMapOvr>
+    <a:masterClrMapping/>
+  </p:clrMapOvr>
+</p:notes>
+</file>
+
+<file path=ppt/notesSlides/notesSlide4.xml><?xml version="1.0" encoding="utf-8"?>
 <p:notes xmlns:a="http://schemas.openxmlformats.org/drawingml/2006/main" xmlns:r="http://schemas.openxmlformats.org/officeDocument/2006/relationships" xmlns:p="http://schemas.openxmlformats.org/presentationml/2006/main">
   <p:cSld>
     <p:spTree>
@@ -727,7 +886,7 @@
           <a:p>
             <a:fld id="{1300335D-9F13-4B80-ADC5-B0EA3E10FF6B}" type="slidenum">
               <a:rPr lang="en-US" smtClean="0"/>
-              <a:t>5</a:t>
+              <a:t>4</a:t>
             </a:fld>
             <a:endParaRPr lang="en-US"/>
           </a:p>
@@ -746,7 +905,7 @@
 </p:notes>
 </file>
 
-<file path=ppt/notesSlides/notesSlide3.xml><?xml version="1.0" encoding="utf-8"?>
+<file path=ppt/notesSlides/notesSlide5.xml><?xml version="1.0" encoding="utf-8"?>
 <p:notes xmlns:a="http://schemas.openxmlformats.org/drawingml/2006/main" xmlns:r="http://schemas.openxmlformats.org/officeDocument/2006/relationships" xmlns:p="http://schemas.openxmlformats.org/presentationml/2006/main">
   <p:cSld>
     <p:spTree>
@@ -852,7 +1011,7 @@
           <a:p>
             <a:fld id="{1300335D-9F13-4B80-ADC5-B0EA3E10FF6B}" type="slidenum">
               <a:rPr lang="en-US" smtClean="0"/>
-              <a:t>6</a:t>
+              <a:t>5</a:t>
             </a:fld>
             <a:endParaRPr lang="en-US"/>
           </a:p>
@@ -871,7 +1030,7 @@
 </p:notes>
 </file>
 
-<file path=ppt/notesSlides/notesSlide4.xml><?xml version="1.0" encoding="utf-8"?>
+<file path=ppt/notesSlides/notesSlide6.xml><?xml version="1.0" encoding="utf-8"?>
 <p:notes xmlns:a="http://schemas.openxmlformats.org/drawingml/2006/main" xmlns:r="http://schemas.openxmlformats.org/officeDocument/2006/relationships" xmlns:p="http://schemas.openxmlformats.org/presentationml/2006/main">
   <p:cSld>
     <p:spTree>
@@ -953,7 +1112,7 @@
           <a:p>
             <a:fld id="{FFB500C5-13F7-48FC-8160-C29AECF6C602}" type="slidenum">
               <a:rPr lang="en-US" smtClean="0"/>
-              <a:t>7</a:t>
+              <a:t>6</a:t>
             </a:fld>
             <a:endParaRPr lang="en-US"/>
           </a:p>
@@ -972,7 +1131,7 @@
 </p:notes>
 </file>
 
-<file path=ppt/notesSlides/notesSlide5.xml><?xml version="1.0" encoding="utf-8"?>
+<file path=ppt/notesSlides/notesSlide7.xml><?xml version="1.0" encoding="utf-8"?>
 <p:notes xmlns:a="http://schemas.openxmlformats.org/drawingml/2006/main" xmlns:r="http://schemas.openxmlformats.org/officeDocument/2006/relationships" xmlns:p="http://schemas.openxmlformats.org/presentationml/2006/main">
   <p:cSld>
     <p:spTree>
@@ -1054,7 +1213,7 @@
           <a:p>
             <a:fld id="{FFB500C5-13F7-48FC-8160-C29AECF6C602}" type="slidenum">
               <a:rPr lang="en-US" smtClean="0"/>
-              <a:t>8</a:t>
+              <a:t>7</a:t>
             </a:fld>
             <a:endParaRPr lang="en-US"/>
           </a:p>
@@ -1066,236 +1225,6 @@
         <p14:creationId xmlns:p14="http://schemas.microsoft.com/office/powerpoint/2010/main" val="146833337"/>
       </p:ext>
     </p:extLst>
-  </p:cSld>
-  <p:clrMapOvr>
-    <a:masterClrMapping/>
-  </p:clrMapOvr>
-</p:notes>
-</file>
-
-<file path=ppt/notesSlides/notesSlide6.xml><?xml version="1.0" encoding="utf-8"?>
-<p:notes xmlns:a="http://schemas.openxmlformats.org/drawingml/2006/main" xmlns:p="http://schemas.openxmlformats.org/presentationml/2006/main" xmlns:r="http://schemas.openxmlformats.org/officeDocument/2006/relationships">
-  <p:cSld>
-    <p:spTree>
-      <p:nvGrpSpPr>
-        <p:cNvPr id="1" name=""/>
-        <p:cNvGrpSpPr/>
-        <p:nvPr/>
-      </p:nvGrpSpPr>
-      <p:grpSpPr>
-        <a:xfrm>
-          <a:off x="0" y="0"/>
-          <a:ext cx="0" cy="0"/>
-          <a:chOff x="0" y="0"/>
-          <a:chExt cx="0" cy="0"/>
-        </a:xfrm>
-      </p:grpSpPr>
-      <p:sp>
-        <p:nvSpPr>
-          <p:cNvPr id="2" name="Slide Image Placeholder 1"/>
-          <p:cNvSpPr>
-            <a:spLocks noGrp="1"/>
-          </p:cNvSpPr>
-          <p:nvPr>
-            <p:ph type="sldImg" idx="2"/>
-          </p:nvPr>
-        </p:nvSpPr>
-        <p:spPr/>
-      </p:sp>
-      <p:sp>
-        <p:nvSpPr>
-          <p:cNvPr id="3" name="Notes Placeholder 2"/>
-          <p:cNvSpPr>
-            <a:spLocks noGrp="1"/>
-          </p:cNvSpPr>
-          <p:nvPr>
-            <p:ph type="body" idx="3" sz="quarter"/>
-          </p:nvPr>
-        </p:nvSpPr>
-        <p:spPr/>
-        <p:txBody>
-          <a:bodyPr/>
-          <a:lstStyle/>
-          <a:p>
-            <a:r>
-              <a:t>Welcome to Day 4. This is the day Excel stops being a place you go and starts being a process that runs without you.</a:t>
-            </a:r>
-          </a:p>
-          <a:p>
-            <a:r>
-              <a:t>Yesterday we made Excel intelligent — Copilot, Python, Agent Mode. But intelligence without execution is just expensive thinking. Today we're closing that gap. Office Scripts capture the steps you take inside Excel; Power Automate runs those steps on triggers — schedules, file uploads, email arrivals, form submissions, you name it.</a:t>
-            </a:r>
-          </a:p>
-          <a:p>
-            <a:r>
-              <a:t>The other big focus today is what's new in Power Automate itself: it now has serious AI baked in. Copilot inside the flow designer can build flows from a sentence of plain English. AI Builder actions can extract, classify, summarize, and prompt right inside a flow. By the end of the hour you'll see how to combine an Office Script with an AI prompt action and a Teams notification — and that pattern alone will save most of you hours every week.</a:t>
-            </a:r>
-          </a:p>
-        </p:txBody>
-      </p:sp>
-      <p:sp>
-        <p:nvSpPr>
-          <p:cNvPr id="4" name="Slide Number Placeholder 3"/>
-          <p:cNvSpPr>
-            <a:spLocks noGrp="1"/>
-          </p:cNvSpPr>
-          <p:nvPr>
-            <p:ph type="sldNum" idx="5" sz="quarter"/>
-          </p:nvPr>
-        </p:nvSpPr>
-        <p:spPr/>
-      </p:sp>
-    </p:spTree>
-  </p:cSld>
-  <p:clrMapOvr>
-    <a:masterClrMapping/>
-  </p:clrMapOvr>
-</p:notes>
-</file>
-
-<file path=ppt/notesSlides/notesSlide7.xml><?xml version="1.0" encoding="utf-8"?>
-<p:notes xmlns:a="http://schemas.openxmlformats.org/drawingml/2006/main" xmlns:p="http://schemas.openxmlformats.org/presentationml/2006/main" xmlns:r="http://schemas.openxmlformats.org/officeDocument/2006/relationships">
-  <p:cSld>
-    <p:spTree>
-      <p:nvGrpSpPr>
-        <p:cNvPr id="1" name=""/>
-        <p:cNvGrpSpPr/>
-        <p:nvPr/>
-      </p:nvGrpSpPr>
-      <p:grpSpPr>
-        <a:xfrm>
-          <a:off x="0" y="0"/>
-          <a:ext cx="0" cy="0"/>
-          <a:chOff x="0" y="0"/>
-          <a:chExt cx="0" cy="0"/>
-        </a:xfrm>
-      </p:grpSpPr>
-      <p:sp>
-        <p:nvSpPr>
-          <p:cNvPr id="2" name="Slide Image Placeholder 1"/>
-          <p:cNvSpPr>
-            <a:spLocks noGrp="1"/>
-          </p:cNvSpPr>
-          <p:nvPr>
-            <p:ph type="sldImg" idx="2"/>
-          </p:nvPr>
-        </p:nvSpPr>
-        <p:spPr/>
-      </p:sp>
-      <p:sp>
-        <p:nvSpPr>
-          <p:cNvPr id="3" name="Notes Placeholder 2"/>
-          <p:cNvSpPr>
-            <a:spLocks noGrp="1"/>
-          </p:cNvSpPr>
-          <p:nvPr>
-            <p:ph type="body" idx="3" sz="quarter"/>
-          </p:nvPr>
-        </p:nvSpPr>
-        <p:spPr/>
-        <p:txBody>
-          <a:bodyPr/>
-          <a:lstStyle/>
-          <a:p>
-            <a:r>
-              <a:t>Same Teams channel, same email, same recordings. Quick note: today's demos involve Power Automate, which means we're working in the make.powerautomate.com environment. If you don't have a Power Automate license at work, you can sign up for the free trial — it's enough to follow along with everything we do today.</a:t>
-            </a:r>
-          </a:p>
-        </p:txBody>
-      </p:sp>
-      <p:sp>
-        <p:nvSpPr>
-          <p:cNvPr id="4" name="Slide Number Placeholder 3"/>
-          <p:cNvSpPr>
-            <a:spLocks noGrp="1"/>
-          </p:cNvSpPr>
-          <p:nvPr>
-            <p:ph type="sldNum" idx="5" sz="quarter"/>
-          </p:nvPr>
-        </p:nvSpPr>
-        <p:spPr/>
-      </p:sp>
-    </p:spTree>
-  </p:cSld>
-  <p:clrMapOvr>
-    <a:masterClrMapping/>
-  </p:clrMapOvr>
-</p:notes>
-</file>
-
-<file path=ppt/notesSlides/notesSlide8.xml><?xml version="1.0" encoding="utf-8"?>
-<p:notes xmlns:a="http://schemas.openxmlformats.org/drawingml/2006/main" xmlns:p="http://schemas.openxmlformats.org/presentationml/2006/main" xmlns:r="http://schemas.openxmlformats.org/officeDocument/2006/relationships">
-  <p:cSld>
-    <p:spTree>
-      <p:nvGrpSpPr>
-        <p:cNvPr id="1" name=""/>
-        <p:cNvGrpSpPr/>
-        <p:nvPr/>
-      </p:nvGrpSpPr>
-      <p:grpSpPr>
-        <a:xfrm>
-          <a:off x="0" y="0"/>
-          <a:ext cx="0" cy="0"/>
-          <a:chOff x="0" y="0"/>
-          <a:chExt cx="0" cy="0"/>
-        </a:xfrm>
-      </p:grpSpPr>
-      <p:sp>
-        <p:nvSpPr>
-          <p:cNvPr id="2" name="Slide Image Placeholder 1"/>
-          <p:cNvSpPr>
-            <a:spLocks noGrp="1"/>
-          </p:cNvSpPr>
-          <p:nvPr>
-            <p:ph type="sldImg" idx="2"/>
-          </p:nvPr>
-        </p:nvSpPr>
-        <p:spPr/>
-      </p:sp>
-      <p:sp>
-        <p:nvSpPr>
-          <p:cNvPr id="3" name="Notes Placeholder 2"/>
-          <p:cNvSpPr>
-            <a:spLocks noGrp="1"/>
-          </p:cNvSpPr>
-          <p:nvPr>
-            <p:ph type="body" idx="3" sz="quarter"/>
-          </p:nvPr>
-        </p:nvSpPr>
-        <p:spPr/>
-        <p:txBody>
-          <a:bodyPr/>
-          <a:lstStyle/>
-          <a:p>
-            <a:r>
-              <a:t>Same stack, climbing one more rung. Foundation, preparation, intelligence, execution, orchestration. We're now at execution. This is the layer that takes everything we built earlier in the week and makes it run on its own.</a:t>
-            </a:r>
-          </a:p>
-          <a:p>
-            <a:r>
-              <a:t>Office Scripts capture the steps inside Excel. Power Automate runs them outside Excel. Together, they're how analysts stop being the bottleneck. You build the logic once, and the system runs it forever.</a:t>
-            </a:r>
-          </a:p>
-          <a:p>
-            <a:r>
-              <a:t>And critically — Power Automate is increasingly an AI tool in its own right. Not just "trigger something, do something, end something." Modern flows can read documents, extract structured data, generate text, classify content, and call out to AI prompt actions in the middle of a process. We'll see all of that today.</a:t>
-            </a:r>
-          </a:p>
-        </p:txBody>
-      </p:sp>
-      <p:sp>
-        <p:nvSpPr>
-          <p:cNvPr id="4" name="Slide Number Placeholder 3"/>
-          <p:cNvSpPr>
-            <a:spLocks noGrp="1"/>
-          </p:cNvSpPr>
-          <p:nvPr>
-            <p:ph type="sldNum" idx="5" sz="quarter"/>
-          </p:nvPr>
-        </p:nvSpPr>
-        <p:spPr/>
-      </p:sp>
-    </p:spTree>
   </p:cSld>
   <p:clrMapOvr>
     <a:masterClrMapping/>
@@ -1483,7 +1412,7 @@
             <a:fld id="{1D8BD707-D9CF-40AE-B4C6-C98DA3205C09}" type="datetimeFigureOut">
               <a:rPr lang="en-US" smtClean="0"/>
               <a:pPr/>
-              <a:t>12/1/2025</a:t>
+              <a:t>4/8/2026</a:t>
             </a:fld>
             <a:endParaRPr lang="en-US"/>
           </a:p>
@@ -1648,7 +1577,7 @@
             <a:fld id="{1D8BD707-D9CF-40AE-B4C6-C98DA3205C09}" type="datetimeFigureOut">
               <a:rPr lang="en-US" smtClean="0"/>
               <a:pPr/>
-              <a:t>12/1/2025</a:t>
+              <a:t>4/8/2026</a:t>
             </a:fld>
             <a:endParaRPr lang="en-US"/>
           </a:p>
@@ -1823,7 +1752,7 @@
             <a:fld id="{1D8BD707-D9CF-40AE-B4C6-C98DA3205C09}" type="datetimeFigureOut">
               <a:rPr lang="en-US" smtClean="0"/>
               <a:pPr/>
-              <a:t>12/1/2025</a:t>
+              <a:t>4/8/2026</a:t>
             </a:fld>
             <a:endParaRPr lang="en-US"/>
           </a:p>
@@ -1988,7 +1917,7 @@
             <a:fld id="{1D8BD707-D9CF-40AE-B4C6-C98DA3205C09}" type="datetimeFigureOut">
               <a:rPr lang="en-US" smtClean="0"/>
               <a:pPr/>
-              <a:t>12/1/2025</a:t>
+              <a:t>4/8/2026</a:t>
             </a:fld>
             <a:endParaRPr lang="en-US"/>
           </a:p>
@@ -2230,7 +2159,7 @@
             <a:fld id="{1D8BD707-D9CF-40AE-B4C6-C98DA3205C09}" type="datetimeFigureOut">
               <a:rPr lang="en-US" smtClean="0"/>
               <a:pPr/>
-              <a:t>12/1/2025</a:t>
+              <a:t>4/8/2026</a:t>
             </a:fld>
             <a:endParaRPr lang="en-US"/>
           </a:p>
@@ -2512,7 +2441,7 @@
             <a:fld id="{1D8BD707-D9CF-40AE-B4C6-C98DA3205C09}" type="datetimeFigureOut">
               <a:rPr lang="en-US" smtClean="0"/>
               <a:pPr/>
-              <a:t>12/1/2025</a:t>
+              <a:t>4/8/2026</a:t>
             </a:fld>
             <a:endParaRPr lang="en-US"/>
           </a:p>
@@ -2928,7 +2857,7 @@
             <a:fld id="{1D8BD707-D9CF-40AE-B4C6-C98DA3205C09}" type="datetimeFigureOut">
               <a:rPr lang="en-US" smtClean="0"/>
               <a:pPr/>
-              <a:t>12/1/2025</a:t>
+              <a:t>4/8/2026</a:t>
             </a:fld>
             <a:endParaRPr lang="en-US"/>
           </a:p>
@@ -3042,7 +2971,7 @@
             <a:fld id="{1D8BD707-D9CF-40AE-B4C6-C98DA3205C09}" type="datetimeFigureOut">
               <a:rPr lang="en-US" smtClean="0"/>
               <a:pPr/>
-              <a:t>12/1/2025</a:t>
+              <a:t>4/8/2026</a:t>
             </a:fld>
             <a:endParaRPr lang="en-US"/>
           </a:p>
@@ -3134,7 +3063,7 @@
             <a:fld id="{1D8BD707-D9CF-40AE-B4C6-C98DA3205C09}" type="datetimeFigureOut">
               <a:rPr lang="en-US" smtClean="0"/>
               <a:pPr/>
-              <a:t>12/1/2025</a:t>
+              <a:t>4/8/2026</a:t>
             </a:fld>
             <a:endParaRPr lang="en-US"/>
           </a:p>
@@ -3406,7 +3335,7 @@
             <a:fld id="{1D8BD707-D9CF-40AE-B4C6-C98DA3205C09}" type="datetimeFigureOut">
               <a:rPr lang="en-US" smtClean="0"/>
               <a:pPr/>
-              <a:t>12/1/2025</a:t>
+              <a:t>4/8/2026</a:t>
             </a:fld>
             <a:endParaRPr lang="en-US"/>
           </a:p>
@@ -3655,7 +3584,7 @@
             <a:fld id="{1D8BD707-D9CF-40AE-B4C6-C98DA3205C09}" type="datetimeFigureOut">
               <a:rPr lang="en-US" smtClean="0"/>
               <a:pPr/>
-              <a:t>12/1/2025</a:t>
+              <a:t>4/8/2026</a:t>
             </a:fld>
             <a:endParaRPr lang="en-US"/>
           </a:p>
@@ -3868,7 +3797,7 @@
             <a:fld id="{1D8BD707-D9CF-40AE-B4C6-C98DA3205C09}" type="datetimeFigureOut">
               <a:rPr lang="en-US" smtClean="0"/>
               <a:pPr/>
-              <a:t>12/1/2025</a:t>
+              <a:t>4/8/2026</a:t>
             </a:fld>
             <a:endParaRPr lang="en-US"/>
           </a:p>
@@ -4248,7 +4177,7 @@
           <p:nvPr/>
         </p:nvPicPr>
         <p:blipFill>
-          <a:blip r:embed="rId2">
+          <a:blip r:embed="rId3">
             <a:extLst>
               <a:ext uri="{28A0092B-C50C-407E-A947-70E740481C1C}">
                 <a14:useLocalDpi xmlns:a14="http://schemas.microsoft.com/office/drawing/2010/main" val="0"/>
@@ -4277,7 +4206,7 @@
           <p:nvPr/>
         </p:nvPicPr>
         <p:blipFill>
-          <a:blip r:embed="rId3">
+          <a:blip r:embed="rId4">
             <a:extLst>
               <a:ext uri="{28A0092B-C50C-407E-A947-70E740481C1C}">
                 <a14:useLocalDpi xmlns:a14="http://schemas.microsoft.com/office/drawing/2010/main" val="0"/>
@@ -4401,7 +4330,1531 @@
 </p:sld>
 </file>
 
-<file path=ppt/slides/slide10.xml><?xml version="1.0" encoding="utf-8"?>
+<file path=ppt/slides/slide2.xml><?xml version="1.0" encoding="utf-8"?>
+<p:sld xmlns:a="http://schemas.openxmlformats.org/drawingml/2006/main" xmlns:r="http://schemas.openxmlformats.org/officeDocument/2006/relationships" xmlns:p="http://schemas.openxmlformats.org/presentationml/2006/main">
+  <p:cSld>
+    <p:spTree>
+      <p:nvGrpSpPr>
+        <p:cNvPr id="1" name="">
+          <a:extLst>
+            <a:ext uri="{FF2B5EF4-FFF2-40B4-BE49-F238E27FC236}">
+              <a16:creationId xmlns:a16="http://schemas.microsoft.com/office/drawing/2014/main" id="{58E778E5-4EE9-9207-6FC7-3D28CF2383AD}"/>
+            </a:ext>
+          </a:extLst>
+        </p:cNvPr>
+        <p:cNvGrpSpPr/>
+        <p:nvPr/>
+      </p:nvGrpSpPr>
+      <p:grpSpPr>
+        <a:xfrm>
+          <a:off x="0" y="0"/>
+          <a:ext cx="0" cy="0"/>
+          <a:chOff x="0" y="0"/>
+          <a:chExt cx="0" cy="0"/>
+        </a:xfrm>
+      </p:grpSpPr>
+      <p:sp>
+        <p:nvSpPr>
+          <p:cNvPr id="11" name="TextBox 10">
+            <a:extLst>
+              <a:ext uri="{FF2B5EF4-FFF2-40B4-BE49-F238E27FC236}">
+                <a16:creationId xmlns:a16="http://schemas.microsoft.com/office/drawing/2014/main" id="{781603C7-76CD-A76B-F955-68F3329D8967}"/>
+              </a:ext>
+            </a:extLst>
+          </p:cNvPr>
+          <p:cNvSpPr txBox="1"/>
+          <p:nvPr/>
+        </p:nvSpPr>
+        <p:spPr>
+          <a:xfrm>
+            <a:off x="520861" y="170082"/>
+            <a:ext cx="14642939" cy="1477328"/>
+          </a:xfrm>
+          <a:prstGeom prst="rect">
+            <a:avLst/>
+          </a:prstGeom>
+          <a:noFill/>
+        </p:spPr>
+        <p:txBody>
+          <a:bodyPr wrap="square" rtlCol="0">
+            <a:spAutoFit/>
+          </a:bodyPr>
+          <a:lstStyle/>
+          <a:p>
+            <a:r>
+              <a:rPr lang="en-US" sz="9000" dirty="0">
+                <a:latin typeface="Aliens &amp; cows" panose="00000500000000000000" pitchFamily="2" charset="0"/>
+              </a:rPr>
+              <a:t>Recap of Day 3</a:t>
+            </a:r>
+          </a:p>
+        </p:txBody>
+      </p:sp>
+      <p:sp>
+        <p:nvSpPr>
+          <p:cNvPr id="3" name="TextBox 2">
+            <a:extLst>
+              <a:ext uri="{FF2B5EF4-FFF2-40B4-BE49-F238E27FC236}">
+                <a16:creationId xmlns:a16="http://schemas.microsoft.com/office/drawing/2014/main" id="{5F84214C-EACA-355D-FAEB-44DBEAE3040B}"/>
+              </a:ext>
+            </a:extLst>
+          </p:cNvPr>
+          <p:cNvSpPr txBox="1"/>
+          <p:nvPr/>
+        </p:nvSpPr>
+        <p:spPr>
+          <a:xfrm>
+            <a:off x="520861" y="2095500"/>
+            <a:ext cx="14393120" cy="2585323"/>
+          </a:xfrm>
+          <a:prstGeom prst="rect">
+            <a:avLst/>
+          </a:prstGeom>
+          <a:noFill/>
+        </p:spPr>
+        <p:txBody>
+          <a:bodyPr wrap="square" rtlCol="0">
+            <a:spAutoFit/>
+          </a:bodyPr>
+          <a:lstStyle/>
+          <a:p>
+            <a:pPr marL="685800" indent="-685800">
+              <a:buClr>
+                <a:srgbClr val="CF3338"/>
+              </a:buClr>
+              <a:buFont typeface="Arial" panose="020B0604020202020204" pitchFamily="34" charset="0"/>
+              <a:buChar char="•"/>
+            </a:pPr>
+            <a:r>
+              <a:rPr lang="en-US" sz="5400" dirty="0">
+                <a:solidFill>
+                  <a:srgbClr val="707070"/>
+                </a:solidFill>
+                <a:latin typeface="Pragmatica" panose="020B0403040502020204" pitchFamily="34" charset="0"/>
+              </a:rPr>
+              <a:t>Excel is now an intelligent workspace</a:t>
+            </a:r>
+          </a:p>
+          <a:p>
+            <a:pPr marL="685800" indent="-685800">
+              <a:buClr>
+                <a:srgbClr val="CF3338"/>
+              </a:buClr>
+              <a:buFont typeface="Arial" panose="020B0604020202020204" pitchFamily="34" charset="0"/>
+              <a:buChar char="•"/>
+            </a:pPr>
+            <a:r>
+              <a:rPr lang="en-US" sz="5400" dirty="0">
+                <a:solidFill>
+                  <a:srgbClr val="707070"/>
+                </a:solidFill>
+                <a:latin typeface="Pragmatica" panose="020B0403040502020204" pitchFamily="34" charset="0"/>
+              </a:rPr>
+              <a:t>But so what: how do you get data in, get results out, and connect it all?</a:t>
+            </a:r>
+          </a:p>
+        </p:txBody>
+      </p:sp>
+      <p:pic>
+        <p:nvPicPr>
+          <p:cNvPr id="15" name="Picture 14" descr="A close up of a sign&#10;&#10;Description automatically generated">
+            <a:extLst>
+              <a:ext uri="{FF2B5EF4-FFF2-40B4-BE49-F238E27FC236}">
+                <a16:creationId xmlns:a16="http://schemas.microsoft.com/office/drawing/2014/main" id="{6959BD9D-5738-BA78-737D-3115164D42C1}"/>
+              </a:ext>
+            </a:extLst>
+          </p:cNvPr>
+          <p:cNvPicPr>
+            <a:picLocks noChangeAspect="1"/>
+          </p:cNvPicPr>
+          <p:nvPr/>
+        </p:nvPicPr>
+        <p:blipFill>
+          <a:blip r:embed="rId3">
+            <a:extLst>
+              <a:ext uri="{28A0092B-C50C-407E-A947-70E740481C1C}">
+                <a14:useLocalDpi xmlns:a14="http://schemas.microsoft.com/office/drawing/2010/main" val="0"/>
+              </a:ext>
+            </a:extLst>
+          </a:blip>
+          <a:stretch>
+            <a:fillRect/>
+          </a:stretch>
+        </p:blipFill>
+        <p:spPr>
+          <a:xfrm>
+            <a:off x="16341036" y="8058429"/>
+            <a:ext cx="1942857" cy="2228571"/>
+          </a:xfrm>
+          <a:prstGeom prst="rect">
+            <a:avLst/>
+          </a:prstGeom>
+        </p:spPr>
+      </p:pic>
+    </p:spTree>
+    <p:extLst>
+      <p:ext uri="{BB962C8B-B14F-4D97-AF65-F5344CB8AC3E}">
+        <p14:creationId xmlns:p14="http://schemas.microsoft.com/office/powerpoint/2010/main" val="769688013"/>
+      </p:ext>
+    </p:extLst>
+  </p:cSld>
+  <p:clrMapOvr>
+    <a:masterClrMapping/>
+  </p:clrMapOvr>
+</p:sld>
+</file>
+
+<file path=ppt/slides/slide3.xml><?xml version="1.0" encoding="utf-8"?>
+<p:sld xmlns:a="http://schemas.openxmlformats.org/drawingml/2006/main" xmlns:r="http://schemas.openxmlformats.org/officeDocument/2006/relationships" xmlns:p="http://schemas.openxmlformats.org/presentationml/2006/main">
+  <p:cSld>
+    <p:spTree>
+      <p:nvGrpSpPr>
+        <p:cNvPr id="1" name="">
+          <a:extLst>
+            <a:ext uri="{FF2B5EF4-FFF2-40B4-BE49-F238E27FC236}">
+              <a16:creationId xmlns:a16="http://schemas.microsoft.com/office/drawing/2014/main" id="{B3E6ACC5-4B11-2B34-2998-BB1C4FC9CC6C}"/>
+            </a:ext>
+          </a:extLst>
+        </p:cNvPr>
+        <p:cNvGrpSpPr/>
+        <p:nvPr/>
+      </p:nvGrpSpPr>
+      <p:grpSpPr>
+        <a:xfrm>
+          <a:off x="0" y="0"/>
+          <a:ext cx="0" cy="0"/>
+          <a:chOff x="0" y="0"/>
+          <a:chExt cx="0" cy="0"/>
+        </a:xfrm>
+      </p:grpSpPr>
+      <p:sp>
+        <p:nvSpPr>
+          <p:cNvPr id="11" name="TextBox 10">
+            <a:extLst>
+              <a:ext uri="{FF2B5EF4-FFF2-40B4-BE49-F238E27FC236}">
+                <a16:creationId xmlns:a16="http://schemas.microsoft.com/office/drawing/2014/main" id="{EDA2185A-0457-8E44-DEEB-D9AF5A6DD844}"/>
+              </a:ext>
+            </a:extLst>
+          </p:cNvPr>
+          <p:cNvSpPr txBox="1"/>
+          <p:nvPr/>
+        </p:nvSpPr>
+        <p:spPr>
+          <a:xfrm>
+            <a:off x="520861" y="170082"/>
+            <a:ext cx="6794339" cy="3785652"/>
+          </a:xfrm>
+          <a:prstGeom prst="rect">
+            <a:avLst/>
+          </a:prstGeom>
+          <a:noFill/>
+        </p:spPr>
+        <p:txBody>
+          <a:bodyPr wrap="square" rtlCol="0">
+            <a:spAutoFit/>
+          </a:bodyPr>
+          <a:lstStyle/>
+          <a:p>
+            <a:r>
+              <a:rPr lang="en-US" sz="8000" dirty="0">
+                <a:latin typeface="Aliens &amp; cows" panose="00000500000000000000" pitchFamily="2" charset="0"/>
+              </a:rPr>
+              <a:t>Welcome to the modern Excel AI stack</a:t>
+            </a:r>
+          </a:p>
+        </p:txBody>
+      </p:sp>
+      <p:pic>
+        <p:nvPicPr>
+          <p:cNvPr id="15" name="Picture 14" descr="A close up of a sign&#10;&#10;Description automatically generated">
+            <a:extLst>
+              <a:ext uri="{FF2B5EF4-FFF2-40B4-BE49-F238E27FC236}">
+                <a16:creationId xmlns:a16="http://schemas.microsoft.com/office/drawing/2014/main" id="{B40CB128-54BB-AAD9-5F61-2143EA93C39E}"/>
+              </a:ext>
+            </a:extLst>
+          </p:cNvPr>
+          <p:cNvPicPr>
+            <a:picLocks noChangeAspect="1"/>
+          </p:cNvPicPr>
+          <p:nvPr/>
+        </p:nvPicPr>
+        <p:blipFill>
+          <a:blip r:embed="rId3">
+            <a:extLst>
+              <a:ext uri="{28A0092B-C50C-407E-A947-70E740481C1C}">
+                <a14:useLocalDpi xmlns:a14="http://schemas.microsoft.com/office/drawing/2010/main" val="0"/>
+              </a:ext>
+            </a:extLst>
+          </a:blip>
+          <a:stretch>
+            <a:fillRect/>
+          </a:stretch>
+        </p:blipFill>
+        <p:spPr>
+          <a:xfrm>
+            <a:off x="16341036" y="8058429"/>
+            <a:ext cx="1942857" cy="2228571"/>
+          </a:xfrm>
+          <a:prstGeom prst="rect">
+            <a:avLst/>
+          </a:prstGeom>
+        </p:spPr>
+      </p:pic>
+      <p:sp>
+        <p:nvSpPr>
+          <p:cNvPr id="4" name="TextBox 3">
+            <a:extLst>
+              <a:ext uri="{FF2B5EF4-FFF2-40B4-BE49-F238E27FC236}">
+                <a16:creationId xmlns:a16="http://schemas.microsoft.com/office/drawing/2014/main" id="{59AB6FFB-7FD0-7057-BC27-8C4B01CE34D2}"/>
+              </a:ext>
+            </a:extLst>
+          </p:cNvPr>
+          <p:cNvSpPr txBox="1"/>
+          <p:nvPr/>
+        </p:nvSpPr>
+        <p:spPr>
+          <a:xfrm>
+            <a:off x="228600" y="8267700"/>
+            <a:ext cx="6400800" cy="1569660"/>
+          </a:xfrm>
+          <a:prstGeom prst="rect">
+            <a:avLst/>
+          </a:prstGeom>
+          <a:noFill/>
+        </p:spPr>
+        <p:txBody>
+          <a:bodyPr wrap="square">
+            <a:spAutoFit/>
+          </a:bodyPr>
+          <a:lstStyle/>
+          <a:p>
+            <a:r>
+              <a:rPr lang="en-US" sz="3200" dirty="0">
+                <a:hlinkClick r:id="rId4"/>
+              </a:rPr>
+              <a:t>https://stringfestanalytics.com/how-to-understand-the-modern-excel-ai-stack/</a:t>
+            </a:r>
+            <a:r>
+              <a:rPr lang="en-US" sz="3200" dirty="0"/>
+              <a:t> </a:t>
+            </a:r>
+          </a:p>
+        </p:txBody>
+      </p:sp>
+      <p:pic>
+        <p:nvPicPr>
+          <p:cNvPr id="6" name="Picture 5">
+            <a:extLst>
+              <a:ext uri="{FF2B5EF4-FFF2-40B4-BE49-F238E27FC236}">
+                <a16:creationId xmlns:a16="http://schemas.microsoft.com/office/drawing/2014/main" id="{03C589B1-F454-E452-2C77-E66777FD849A}"/>
+              </a:ext>
+            </a:extLst>
+          </p:cNvPr>
+          <p:cNvPicPr>
+            <a:picLocks noChangeAspect="1"/>
+          </p:cNvPicPr>
+          <p:nvPr/>
+        </p:nvPicPr>
+        <p:blipFill>
+          <a:blip r:embed="rId5">
+            <a:extLst>
+              <a:ext uri="{28A0092B-C50C-407E-A947-70E740481C1C}">
+                <a14:useLocalDpi xmlns:a14="http://schemas.microsoft.com/office/drawing/2010/main" val="0"/>
+              </a:ext>
+            </a:extLst>
+          </a:blip>
+          <a:stretch>
+            <a:fillRect/>
+          </a:stretch>
+        </p:blipFill>
+        <p:spPr>
+          <a:xfrm>
+            <a:off x="7716644" y="266700"/>
+            <a:ext cx="9753600" cy="9753600"/>
+          </a:xfrm>
+          <a:prstGeom prst="rect">
+            <a:avLst/>
+          </a:prstGeom>
+        </p:spPr>
+      </p:pic>
+      <p:sp>
+        <p:nvSpPr>
+          <p:cNvPr id="2" name="Rectangle 1">
+            <a:extLst>
+              <a:ext uri="{FF2B5EF4-FFF2-40B4-BE49-F238E27FC236}">
+                <a16:creationId xmlns:a16="http://schemas.microsoft.com/office/drawing/2014/main" id="{2A65A1F1-433D-842C-ED33-95F0AF974DBB}"/>
+              </a:ext>
+            </a:extLst>
+          </p:cNvPr>
+          <p:cNvSpPr/>
+          <p:nvPr/>
+        </p:nvSpPr>
+        <p:spPr>
+          <a:xfrm>
+            <a:off x="8839200" y="3467100"/>
+            <a:ext cx="8610600" cy="1524000"/>
+          </a:xfrm>
+          <a:prstGeom prst="rect">
+            <a:avLst/>
+          </a:prstGeom>
+          <a:noFill/>
+          <a:ln w="76200">
+            <a:solidFill>
+              <a:srgbClr val="CF3338"/>
+            </a:solidFill>
+          </a:ln>
+        </p:spPr>
+        <p:style>
+          <a:lnRef idx="2">
+            <a:schemeClr val="accent1">
+              <a:shade val="15000"/>
+            </a:schemeClr>
+          </a:lnRef>
+          <a:fillRef idx="1">
+            <a:schemeClr val="accent1"/>
+          </a:fillRef>
+          <a:effectRef idx="0">
+            <a:schemeClr val="accent1"/>
+          </a:effectRef>
+          <a:fontRef idx="minor">
+            <a:schemeClr val="lt1"/>
+          </a:fontRef>
+        </p:style>
+        <p:txBody>
+          <a:bodyPr rtlCol="0" anchor="ctr"/>
+          <a:lstStyle/>
+          <a:p>
+            <a:pPr algn="ctr"/>
+            <a:endParaRPr lang="en-US"/>
+          </a:p>
+        </p:txBody>
+      </p:sp>
+    </p:spTree>
+    <p:extLst>
+      <p:ext uri="{BB962C8B-B14F-4D97-AF65-F5344CB8AC3E}">
+        <p14:creationId xmlns:p14="http://schemas.microsoft.com/office/powerpoint/2010/main" val="2791422705"/>
+      </p:ext>
+    </p:extLst>
+  </p:cSld>
+  <p:clrMapOvr>
+    <a:masterClrMapping/>
+  </p:clrMapOvr>
+</p:sld>
+</file>
+
+<file path=ppt/slides/slide4.xml><?xml version="1.0" encoding="utf-8"?>
+<p:sld xmlns:a="http://schemas.openxmlformats.org/drawingml/2006/main" xmlns:r="http://schemas.openxmlformats.org/officeDocument/2006/relationships" xmlns:p="http://schemas.openxmlformats.org/presentationml/2006/main">
+  <p:cSld>
+    <p:spTree>
+      <p:nvGrpSpPr>
+        <p:cNvPr id="1" name="">
+          <a:extLst>
+            <a:ext uri="{FF2B5EF4-FFF2-40B4-BE49-F238E27FC236}">
+              <a16:creationId xmlns:a16="http://schemas.microsoft.com/office/drawing/2014/main" id="{B245543C-FC2F-706C-0319-AF2E02C1797B}"/>
+            </a:ext>
+          </a:extLst>
+        </p:cNvPr>
+        <p:cNvGrpSpPr/>
+        <p:nvPr/>
+      </p:nvGrpSpPr>
+      <p:grpSpPr>
+        <a:xfrm>
+          <a:off x="0" y="0"/>
+          <a:ext cx="0" cy="0"/>
+          <a:chOff x="0" y="0"/>
+          <a:chExt cx="0" cy="0"/>
+        </a:xfrm>
+      </p:grpSpPr>
+      <p:sp>
+        <p:nvSpPr>
+          <p:cNvPr id="4" name="Rectangle 3">
+            <a:extLst>
+              <a:ext uri="{FF2B5EF4-FFF2-40B4-BE49-F238E27FC236}">
+                <a16:creationId xmlns:a16="http://schemas.microsoft.com/office/drawing/2014/main" id="{490E9BB0-DF62-7CD8-AD9E-9B07D47A3EA3}"/>
+              </a:ext>
+            </a:extLst>
+          </p:cNvPr>
+          <p:cNvSpPr/>
+          <p:nvPr/>
+        </p:nvSpPr>
+        <p:spPr>
+          <a:xfrm>
+            <a:off x="9861630" y="0"/>
+            <a:ext cx="8426370" cy="10287000"/>
+          </a:xfrm>
+          <a:prstGeom prst="rect">
+            <a:avLst/>
+          </a:prstGeom>
+          <a:solidFill>
+            <a:srgbClr val="CF3338"/>
+          </a:solidFill>
+          <a:ln>
+            <a:noFill/>
+          </a:ln>
+        </p:spPr>
+        <p:style>
+          <a:lnRef idx="2">
+            <a:schemeClr val="accent1">
+              <a:shade val="50000"/>
+            </a:schemeClr>
+          </a:lnRef>
+          <a:fillRef idx="1">
+            <a:schemeClr val="accent1"/>
+          </a:fillRef>
+          <a:effectRef idx="0">
+            <a:schemeClr val="accent1"/>
+          </a:effectRef>
+          <a:fontRef idx="minor">
+            <a:schemeClr val="lt1"/>
+          </a:fontRef>
+        </p:style>
+        <p:txBody>
+          <a:bodyPr rtlCol="0" anchor="ctr"/>
+          <a:lstStyle/>
+          <a:p>
+            <a:pPr algn="ctr"/>
+            <a:endParaRPr lang="en-US" sz="2700"/>
+          </a:p>
+        </p:txBody>
+      </p:sp>
+      <p:pic>
+        <p:nvPicPr>
+          <p:cNvPr id="2" name="Picture 1">
+            <a:extLst>
+              <a:ext uri="{FF2B5EF4-FFF2-40B4-BE49-F238E27FC236}">
+                <a16:creationId xmlns:a16="http://schemas.microsoft.com/office/drawing/2014/main" id="{75EAA4D7-8279-B257-6D3E-F96D3198579A}"/>
+              </a:ext>
+            </a:extLst>
+          </p:cNvPr>
+          <p:cNvPicPr>
+            <a:picLocks noChangeAspect="1"/>
+          </p:cNvPicPr>
+          <p:nvPr/>
+        </p:nvPicPr>
+        <p:blipFill rotWithShape="1">
+          <a:blip r:embed="rId3">
+            <a:extLst>
+              <a:ext uri="{28A0092B-C50C-407E-A947-70E740481C1C}">
+                <a14:useLocalDpi xmlns:a14="http://schemas.microsoft.com/office/drawing/2010/main" val="0"/>
+              </a:ext>
+            </a:extLst>
+          </a:blip>
+          <a:srcRect l="69227" t="33418" r="20112" b="50548"/>
+          <a:stretch/>
+        </p:blipFill>
+        <p:spPr>
+          <a:xfrm>
+            <a:off x="15579524" y="7544693"/>
+            <a:ext cx="2708477" cy="2987579"/>
+          </a:xfrm>
+          <a:prstGeom prst="rect">
+            <a:avLst/>
+          </a:prstGeom>
+        </p:spPr>
+      </p:pic>
+      <p:sp>
+        <p:nvSpPr>
+          <p:cNvPr id="3" name="TextBox 2">
+            <a:extLst>
+              <a:ext uri="{FF2B5EF4-FFF2-40B4-BE49-F238E27FC236}">
+                <a16:creationId xmlns:a16="http://schemas.microsoft.com/office/drawing/2014/main" id="{74B1D248-3DA4-EF63-972E-3DC8117D97E9}"/>
+              </a:ext>
+            </a:extLst>
+          </p:cNvPr>
+          <p:cNvSpPr txBox="1"/>
+          <p:nvPr/>
+        </p:nvSpPr>
+        <p:spPr>
+          <a:xfrm>
+            <a:off x="260431" y="329879"/>
+            <a:ext cx="8906720" cy="4978671"/>
+          </a:xfrm>
+          <a:prstGeom prst="rect">
+            <a:avLst/>
+          </a:prstGeom>
+          <a:noFill/>
+        </p:spPr>
+        <p:txBody>
+          <a:bodyPr wrap="square" rtlCol="0">
+            <a:spAutoFit/>
+          </a:bodyPr>
+          <a:lstStyle/>
+          <a:p>
+            <a:r>
+              <a:rPr lang="en-US" sz="6000" b="1" dirty="0">
+                <a:solidFill>
+                  <a:srgbClr val="CF3338"/>
+                </a:solidFill>
+                <a:latin typeface="Pragmatica" panose="020B0403040502020204" pitchFamily="34" charset="0"/>
+              </a:rPr>
+              <a:t>Office Scripts + Power Automate, part 1</a:t>
+            </a:r>
+          </a:p>
+          <a:p>
+            <a:pPr marL="142875">
+              <a:lnSpc>
+                <a:spcPct val="115000"/>
+              </a:lnSpc>
+              <a:spcBef>
+                <a:spcPts val="1125"/>
+              </a:spcBef>
+              <a:buClr>
+                <a:srgbClr val="C00000"/>
+              </a:buClr>
+              <a:buSzPts val="2100"/>
+            </a:pPr>
+            <a:endParaRPr lang="en-US" sz="4200" dirty="0">
+              <a:solidFill>
+                <a:srgbClr val="CF3338"/>
+              </a:solidFill>
+              <a:latin typeface="Pragmatica" panose="020B0403040502020204" pitchFamily="34" charset="0"/>
+              <a:sym typeface="Consolas"/>
+            </a:endParaRPr>
+          </a:p>
+          <a:p>
+            <a:pPr marL="714375" indent="-571500">
+              <a:lnSpc>
+                <a:spcPct val="115000"/>
+              </a:lnSpc>
+              <a:spcBef>
+                <a:spcPts val="1125"/>
+              </a:spcBef>
+              <a:buClr>
+                <a:srgbClr val="C00000"/>
+              </a:buClr>
+              <a:buSzPts val="2100"/>
+              <a:buFont typeface="Arial" panose="020B0604020202020204" pitchFamily="34" charset="0"/>
+              <a:buChar char="•"/>
+            </a:pPr>
+            <a:r>
+              <a:rPr lang="en-US" sz="3600" dirty="0">
+                <a:solidFill>
+                  <a:srgbClr val="C00000"/>
+                </a:solidFill>
+                <a:latin typeface="Pragmatica" panose="020B0403040502020204"/>
+                <a:sym typeface="Consolas"/>
+              </a:rPr>
+              <a:t>Run a TOC updater script on schedule</a:t>
+            </a:r>
+          </a:p>
+          <a:p>
+            <a:pPr marL="142875">
+              <a:lnSpc>
+                <a:spcPct val="115000"/>
+              </a:lnSpc>
+              <a:spcBef>
+                <a:spcPts val="1125"/>
+              </a:spcBef>
+              <a:buClr>
+                <a:srgbClr val="C00000"/>
+              </a:buClr>
+              <a:buSzPts val="2100"/>
+            </a:pPr>
+            <a:r>
+              <a:rPr lang="en-US" sz="3600" dirty="0">
+                <a:solidFill>
+                  <a:srgbClr val="C00000"/>
+                </a:solidFill>
+                <a:latin typeface="Pragmatica" panose="020B0403040502020204"/>
+                <a:sym typeface="Consolas"/>
+              </a:rPr>
+              <a:t>Files: </a:t>
+            </a:r>
+            <a:r>
+              <a:rPr lang="en-US" sz="3600" dirty="0">
+                <a:solidFill>
+                  <a:srgbClr val="C00000"/>
+                </a:solidFill>
+                <a:latin typeface="Consolas" panose="020B0609020204030204" pitchFamily="49" charset="0"/>
+                <a:sym typeface="Consolas"/>
+              </a:rPr>
+              <a:t>power-automate-office-scripts.xlsx</a:t>
+            </a:r>
+            <a:r>
+              <a:rPr lang="en-US" sz="3600" dirty="0">
+                <a:solidFill>
+                  <a:srgbClr val="C00000"/>
+                </a:solidFill>
+                <a:latin typeface="Pragmatica" panose="020B0403040502020204"/>
+                <a:sym typeface="Consolas"/>
+              </a:rPr>
+              <a:t>, </a:t>
+            </a:r>
+            <a:r>
+              <a:rPr lang="en-US" sz="3600" dirty="0">
+                <a:solidFill>
+                  <a:srgbClr val="C00000"/>
+                </a:solidFill>
+                <a:latin typeface="Consolas" panose="020B0609020204030204" pitchFamily="49" charset="0"/>
+                <a:sym typeface="Consolas"/>
+              </a:rPr>
+              <a:t>add-toc.txt</a:t>
+            </a:r>
+          </a:p>
+        </p:txBody>
+      </p:sp>
+    </p:spTree>
+    <p:extLst>
+      <p:ext uri="{BB962C8B-B14F-4D97-AF65-F5344CB8AC3E}">
+        <p14:creationId xmlns:p14="http://schemas.microsoft.com/office/powerpoint/2010/main" val="2311970800"/>
+      </p:ext>
+    </p:extLst>
+  </p:cSld>
+  <p:clrMapOvr>
+    <a:masterClrMapping/>
+  </p:clrMapOvr>
+</p:sld>
+</file>
+
+<file path=ppt/slides/slide5.xml><?xml version="1.0" encoding="utf-8"?>
+<p:sld xmlns:a="http://schemas.openxmlformats.org/drawingml/2006/main" xmlns:r="http://schemas.openxmlformats.org/officeDocument/2006/relationships" xmlns:p="http://schemas.openxmlformats.org/presentationml/2006/main">
+  <p:cSld>
+    <p:spTree>
+      <p:nvGrpSpPr>
+        <p:cNvPr id="1" name="">
+          <a:extLst>
+            <a:ext uri="{FF2B5EF4-FFF2-40B4-BE49-F238E27FC236}">
+              <a16:creationId xmlns:a16="http://schemas.microsoft.com/office/drawing/2014/main" id="{764F59BA-0C2F-2749-8CB4-7E6DE8743692}"/>
+            </a:ext>
+          </a:extLst>
+        </p:cNvPr>
+        <p:cNvGrpSpPr/>
+        <p:nvPr/>
+      </p:nvGrpSpPr>
+      <p:grpSpPr>
+        <a:xfrm>
+          <a:off x="0" y="0"/>
+          <a:ext cx="0" cy="0"/>
+          <a:chOff x="0" y="0"/>
+          <a:chExt cx="0" cy="0"/>
+        </a:xfrm>
+      </p:grpSpPr>
+      <p:sp>
+        <p:nvSpPr>
+          <p:cNvPr id="4" name="Rectangle 3">
+            <a:extLst>
+              <a:ext uri="{FF2B5EF4-FFF2-40B4-BE49-F238E27FC236}">
+                <a16:creationId xmlns:a16="http://schemas.microsoft.com/office/drawing/2014/main" id="{B454C4F1-8816-5B7C-5A36-487DF1D2DC2B}"/>
+              </a:ext>
+            </a:extLst>
+          </p:cNvPr>
+          <p:cNvSpPr/>
+          <p:nvPr/>
+        </p:nvSpPr>
+        <p:spPr>
+          <a:xfrm>
+            <a:off x="9861630" y="0"/>
+            <a:ext cx="8426370" cy="10287000"/>
+          </a:xfrm>
+          <a:prstGeom prst="rect">
+            <a:avLst/>
+          </a:prstGeom>
+          <a:solidFill>
+            <a:srgbClr val="CF3338"/>
+          </a:solidFill>
+          <a:ln>
+            <a:noFill/>
+          </a:ln>
+        </p:spPr>
+        <p:style>
+          <a:lnRef idx="2">
+            <a:schemeClr val="accent1">
+              <a:shade val="50000"/>
+            </a:schemeClr>
+          </a:lnRef>
+          <a:fillRef idx="1">
+            <a:schemeClr val="accent1"/>
+          </a:fillRef>
+          <a:effectRef idx="0">
+            <a:schemeClr val="accent1"/>
+          </a:effectRef>
+          <a:fontRef idx="minor">
+            <a:schemeClr val="lt1"/>
+          </a:fontRef>
+        </p:style>
+        <p:txBody>
+          <a:bodyPr rtlCol="0" anchor="ctr"/>
+          <a:lstStyle/>
+          <a:p>
+            <a:pPr algn="ctr"/>
+            <a:endParaRPr lang="en-US" sz="2700"/>
+          </a:p>
+        </p:txBody>
+      </p:sp>
+      <p:pic>
+        <p:nvPicPr>
+          <p:cNvPr id="2" name="Picture 1">
+            <a:extLst>
+              <a:ext uri="{FF2B5EF4-FFF2-40B4-BE49-F238E27FC236}">
+                <a16:creationId xmlns:a16="http://schemas.microsoft.com/office/drawing/2014/main" id="{8FD33BFB-92A5-B8BE-BE2A-90100EC88BE0}"/>
+              </a:ext>
+            </a:extLst>
+          </p:cNvPr>
+          <p:cNvPicPr>
+            <a:picLocks noChangeAspect="1"/>
+          </p:cNvPicPr>
+          <p:nvPr/>
+        </p:nvPicPr>
+        <p:blipFill rotWithShape="1">
+          <a:blip r:embed="rId3">
+            <a:extLst>
+              <a:ext uri="{28A0092B-C50C-407E-A947-70E740481C1C}">
+                <a14:useLocalDpi xmlns:a14="http://schemas.microsoft.com/office/drawing/2010/main" val="0"/>
+              </a:ext>
+            </a:extLst>
+          </a:blip>
+          <a:srcRect l="69227" t="33418" r="20112" b="50548"/>
+          <a:stretch/>
+        </p:blipFill>
+        <p:spPr>
+          <a:xfrm>
+            <a:off x="15579524" y="7544693"/>
+            <a:ext cx="2708477" cy="2987579"/>
+          </a:xfrm>
+          <a:prstGeom prst="rect">
+            <a:avLst/>
+          </a:prstGeom>
+        </p:spPr>
+      </p:pic>
+      <p:sp>
+        <p:nvSpPr>
+          <p:cNvPr id="3" name="TextBox 2">
+            <a:extLst>
+              <a:ext uri="{FF2B5EF4-FFF2-40B4-BE49-F238E27FC236}">
+                <a16:creationId xmlns:a16="http://schemas.microsoft.com/office/drawing/2014/main" id="{DB60F8A7-E120-24F7-0163-56AAE5565745}"/>
+              </a:ext>
+            </a:extLst>
+          </p:cNvPr>
+          <p:cNvSpPr txBox="1"/>
+          <p:nvPr/>
+        </p:nvSpPr>
+        <p:spPr>
+          <a:xfrm>
+            <a:off x="260431" y="329879"/>
+            <a:ext cx="8906720" cy="5756832"/>
+          </a:xfrm>
+          <a:prstGeom prst="rect">
+            <a:avLst/>
+          </a:prstGeom>
+          <a:noFill/>
+        </p:spPr>
+        <p:txBody>
+          <a:bodyPr wrap="square" rtlCol="0">
+            <a:spAutoFit/>
+          </a:bodyPr>
+          <a:lstStyle/>
+          <a:p>
+            <a:r>
+              <a:rPr lang="en-US" sz="6000" b="1" dirty="0">
+                <a:solidFill>
+                  <a:srgbClr val="CF3338"/>
+                </a:solidFill>
+                <a:latin typeface="Pragmatica" panose="020B0403040502020204" pitchFamily="34" charset="0"/>
+              </a:rPr>
+              <a:t>Office Scripts + Power Automate, part 2</a:t>
+            </a:r>
+          </a:p>
+          <a:p>
+            <a:pPr marL="142875">
+              <a:lnSpc>
+                <a:spcPct val="115000"/>
+              </a:lnSpc>
+              <a:spcBef>
+                <a:spcPts val="1125"/>
+              </a:spcBef>
+              <a:buClr>
+                <a:srgbClr val="C00000"/>
+              </a:buClr>
+              <a:buSzPts val="2100"/>
+            </a:pPr>
+            <a:endParaRPr lang="en-US" sz="4200" dirty="0">
+              <a:solidFill>
+                <a:srgbClr val="CF3338"/>
+              </a:solidFill>
+              <a:latin typeface="Pragmatica" panose="020B0403040502020204" pitchFamily="34" charset="0"/>
+              <a:sym typeface="Consolas"/>
+            </a:endParaRPr>
+          </a:p>
+          <a:p>
+            <a:pPr marL="714375" indent="-571500">
+              <a:lnSpc>
+                <a:spcPct val="115000"/>
+              </a:lnSpc>
+              <a:spcBef>
+                <a:spcPts val="1125"/>
+              </a:spcBef>
+              <a:buClr>
+                <a:srgbClr val="C00000"/>
+              </a:buClr>
+              <a:buSzPts val="2100"/>
+              <a:buFont typeface="Arial" panose="020B0604020202020204" pitchFamily="34" charset="0"/>
+              <a:buChar char="•"/>
+            </a:pPr>
+            <a:r>
+              <a:rPr lang="en-US" sz="3600" dirty="0">
+                <a:solidFill>
+                  <a:srgbClr val="C00000"/>
+                </a:solidFill>
+                <a:latin typeface="Pragmatica" panose="020B0403040502020204"/>
+                <a:sym typeface="Consolas"/>
+              </a:rPr>
+              <a:t>How can we apply the same script to multiple workbooks? </a:t>
+            </a:r>
+          </a:p>
+          <a:p>
+            <a:pPr marL="714375" indent="-571500">
+              <a:lnSpc>
+                <a:spcPct val="115000"/>
+              </a:lnSpc>
+              <a:spcBef>
+                <a:spcPts val="1125"/>
+              </a:spcBef>
+              <a:buClr>
+                <a:srgbClr val="C00000"/>
+              </a:buClr>
+              <a:buSzPts val="2100"/>
+              <a:buFont typeface="Arial" panose="020B0604020202020204" pitchFamily="34" charset="0"/>
+              <a:buChar char="•"/>
+            </a:pPr>
+            <a:r>
+              <a:rPr lang="en-US" sz="3600" dirty="0">
+                <a:solidFill>
+                  <a:srgbClr val="C00000"/>
+                </a:solidFill>
+                <a:latin typeface="Pragmatica" panose="020B0403040502020204"/>
+                <a:sym typeface="Consolas"/>
+              </a:rPr>
+              <a:t>Use conditional logic to validate filetype</a:t>
+            </a:r>
+          </a:p>
+          <a:p>
+            <a:pPr marL="142875">
+              <a:lnSpc>
+                <a:spcPct val="115000"/>
+              </a:lnSpc>
+              <a:spcBef>
+                <a:spcPts val="1125"/>
+              </a:spcBef>
+              <a:buClr>
+                <a:srgbClr val="C00000"/>
+              </a:buClr>
+              <a:buSzPts val="2100"/>
+            </a:pPr>
+            <a:r>
+              <a:rPr lang="en-US" sz="3600" dirty="0">
+                <a:solidFill>
+                  <a:srgbClr val="C00000"/>
+                </a:solidFill>
+                <a:latin typeface="Pragmatica" panose="020B0403040502020204"/>
+                <a:sym typeface="Consolas"/>
+              </a:rPr>
+              <a:t>Folder: </a:t>
+            </a:r>
+            <a:r>
+              <a:rPr lang="en-US" sz="3600" dirty="0">
+                <a:solidFill>
+                  <a:srgbClr val="C00000"/>
+                </a:solidFill>
+                <a:latin typeface="Consolas" panose="020B0609020204030204" pitchFamily="49" charset="0"/>
+                <a:sym typeface="Consolas"/>
+              </a:rPr>
+              <a:t>multiple-workbooks</a:t>
+            </a:r>
+          </a:p>
+        </p:txBody>
+      </p:sp>
+    </p:spTree>
+    <p:extLst>
+      <p:ext uri="{BB962C8B-B14F-4D97-AF65-F5344CB8AC3E}">
+        <p14:creationId xmlns:p14="http://schemas.microsoft.com/office/powerpoint/2010/main" val="4221522694"/>
+      </p:ext>
+    </p:extLst>
+  </p:cSld>
+  <p:clrMapOvr>
+    <a:masterClrMapping/>
+  </p:clrMapOvr>
+</p:sld>
+</file>
+
+<file path=ppt/slides/slide6.xml><?xml version="1.0" encoding="utf-8"?>
+<p:sld xmlns:a="http://schemas.openxmlformats.org/drawingml/2006/main" xmlns:r="http://schemas.openxmlformats.org/officeDocument/2006/relationships" xmlns:p="http://schemas.openxmlformats.org/presentationml/2006/main">
+  <p:cSld>
+    <p:spTree>
+      <p:nvGrpSpPr>
+        <p:cNvPr id="1" name="">
+          <a:extLst>
+            <a:ext uri="{FF2B5EF4-FFF2-40B4-BE49-F238E27FC236}">
+              <a16:creationId xmlns:a16="http://schemas.microsoft.com/office/drawing/2014/main" id="{D687E3AC-4FA3-83DA-F79F-26551AD8550C}"/>
+            </a:ext>
+          </a:extLst>
+        </p:cNvPr>
+        <p:cNvGrpSpPr/>
+        <p:nvPr/>
+      </p:nvGrpSpPr>
+      <p:grpSpPr>
+        <a:xfrm>
+          <a:off x="0" y="0"/>
+          <a:ext cx="0" cy="0"/>
+          <a:chOff x="0" y="0"/>
+          <a:chExt cx="0" cy="0"/>
+        </a:xfrm>
+      </p:grpSpPr>
+      <p:sp>
+        <p:nvSpPr>
+          <p:cNvPr id="11" name="TextBox 10">
+            <a:extLst>
+              <a:ext uri="{FF2B5EF4-FFF2-40B4-BE49-F238E27FC236}">
+                <a16:creationId xmlns:a16="http://schemas.microsoft.com/office/drawing/2014/main" id="{FFF83F61-9347-B3FC-96FC-70DF3E10AC66}"/>
+              </a:ext>
+            </a:extLst>
+          </p:cNvPr>
+          <p:cNvSpPr txBox="1"/>
+          <p:nvPr/>
+        </p:nvSpPr>
+        <p:spPr>
+          <a:xfrm>
+            <a:off x="520861" y="170082"/>
+            <a:ext cx="14642939" cy="1477328"/>
+          </a:xfrm>
+          <a:prstGeom prst="rect">
+            <a:avLst/>
+          </a:prstGeom>
+          <a:noFill/>
+        </p:spPr>
+        <p:txBody>
+          <a:bodyPr wrap="square" rtlCol="0">
+            <a:spAutoFit/>
+          </a:bodyPr>
+          <a:lstStyle/>
+          <a:p>
+            <a:r>
+              <a:rPr lang="en-US" sz="9000" dirty="0">
+                <a:latin typeface="Aliens &amp; cows" panose="00000500000000000000" pitchFamily="2" charset="0"/>
+              </a:rPr>
+              <a:t>So what for AI?</a:t>
+            </a:r>
+          </a:p>
+        </p:txBody>
+      </p:sp>
+      <p:sp>
+        <p:nvSpPr>
+          <p:cNvPr id="3" name="TextBox 2">
+            <a:extLst>
+              <a:ext uri="{FF2B5EF4-FFF2-40B4-BE49-F238E27FC236}">
+                <a16:creationId xmlns:a16="http://schemas.microsoft.com/office/drawing/2014/main" id="{7A23AEB3-4E11-C3D4-E894-27B00448C33C}"/>
+              </a:ext>
+            </a:extLst>
+          </p:cNvPr>
+          <p:cNvSpPr txBox="1"/>
+          <p:nvPr/>
+        </p:nvSpPr>
+        <p:spPr>
+          <a:xfrm>
+            <a:off x="520861" y="2095500"/>
+            <a:ext cx="14393120" cy="6740307"/>
+          </a:xfrm>
+          <a:prstGeom prst="rect">
+            <a:avLst/>
+          </a:prstGeom>
+          <a:noFill/>
+        </p:spPr>
+        <p:txBody>
+          <a:bodyPr wrap="square" rtlCol="0">
+            <a:spAutoFit/>
+          </a:bodyPr>
+          <a:lstStyle/>
+          <a:p>
+            <a:pPr marL="685800" indent="-685800">
+              <a:buClr>
+                <a:srgbClr val="CF3338"/>
+              </a:buClr>
+              <a:buFont typeface="Arial" panose="020B0604020202020204" pitchFamily="34" charset="0"/>
+              <a:buChar char="•"/>
+            </a:pPr>
+            <a:r>
+              <a:rPr lang="en-US" sz="5400" dirty="0">
+                <a:solidFill>
+                  <a:srgbClr val="707070"/>
+                </a:solidFill>
+                <a:latin typeface="Pragmatica" panose="020B0403040502020204" pitchFamily="34" charset="0"/>
+              </a:rPr>
+              <a:t>AI gives insights: Scripts + Flows make them happen</a:t>
+            </a:r>
+          </a:p>
+          <a:p>
+            <a:pPr marL="685800" indent="-685800">
+              <a:buClr>
+                <a:srgbClr val="CF3338"/>
+              </a:buClr>
+              <a:buFont typeface="Arial" panose="020B0604020202020204" pitchFamily="34" charset="0"/>
+              <a:buChar char="•"/>
+            </a:pPr>
+            <a:r>
+              <a:rPr lang="en-US" sz="5400" dirty="0">
+                <a:solidFill>
+                  <a:srgbClr val="707070"/>
+                </a:solidFill>
+                <a:latin typeface="Pragmatica" panose="020B0403040502020204" pitchFamily="34" charset="0"/>
+              </a:rPr>
+              <a:t>Turns AI-generated logic into repeatable, scheduled workflows</a:t>
+            </a:r>
+          </a:p>
+          <a:p>
+            <a:pPr marL="685800" indent="-685800">
+              <a:buClr>
+                <a:srgbClr val="CF3338"/>
+              </a:buClr>
+              <a:buFont typeface="Arial" panose="020B0604020202020204" pitchFamily="34" charset="0"/>
+              <a:buChar char="•"/>
+            </a:pPr>
+            <a:r>
+              <a:rPr lang="en-US" sz="5400" dirty="0">
+                <a:solidFill>
+                  <a:srgbClr val="707070"/>
+                </a:solidFill>
+                <a:latin typeface="Pragmatica" panose="020B0403040502020204" pitchFamily="34" charset="0"/>
+              </a:rPr>
+              <a:t>Gives Copilot a place to hand off real work (refresh, clean, notify) </a:t>
+            </a:r>
+          </a:p>
+          <a:p>
+            <a:pPr marL="685800" indent="-685800">
+              <a:buClr>
+                <a:srgbClr val="CF3338"/>
+              </a:buClr>
+              <a:buFont typeface="Arial" panose="020B0604020202020204" pitchFamily="34" charset="0"/>
+              <a:buChar char="•"/>
+            </a:pPr>
+            <a:r>
+              <a:rPr lang="en-US" sz="5400" dirty="0">
+                <a:solidFill>
+                  <a:srgbClr val="707070"/>
+                </a:solidFill>
+                <a:latin typeface="Pragmatica" panose="020B0403040502020204" pitchFamily="34" charset="0"/>
+              </a:rPr>
+              <a:t>Builds the “execution layer” of the Modern Excel AI Stack.</a:t>
+            </a:r>
+          </a:p>
+        </p:txBody>
+      </p:sp>
+      <p:pic>
+        <p:nvPicPr>
+          <p:cNvPr id="15" name="Picture 14" descr="A close up of a sign&#10;&#10;Description automatically generated">
+            <a:extLst>
+              <a:ext uri="{FF2B5EF4-FFF2-40B4-BE49-F238E27FC236}">
+                <a16:creationId xmlns:a16="http://schemas.microsoft.com/office/drawing/2014/main" id="{96DC29E9-117A-CF3F-ECBD-08964AD5B8F2}"/>
+              </a:ext>
+            </a:extLst>
+          </p:cNvPr>
+          <p:cNvPicPr>
+            <a:picLocks noChangeAspect="1"/>
+          </p:cNvPicPr>
+          <p:nvPr/>
+        </p:nvPicPr>
+        <p:blipFill>
+          <a:blip r:embed="rId3">
+            <a:extLst>
+              <a:ext uri="{28A0092B-C50C-407E-A947-70E740481C1C}">
+                <a14:useLocalDpi xmlns:a14="http://schemas.microsoft.com/office/drawing/2010/main" val="0"/>
+              </a:ext>
+            </a:extLst>
+          </a:blip>
+          <a:stretch>
+            <a:fillRect/>
+          </a:stretch>
+        </p:blipFill>
+        <p:spPr>
+          <a:xfrm>
+            <a:off x="16341036" y="8058429"/>
+            <a:ext cx="1942857" cy="2228571"/>
+          </a:xfrm>
+          <a:prstGeom prst="rect">
+            <a:avLst/>
+          </a:prstGeom>
+        </p:spPr>
+      </p:pic>
+    </p:spTree>
+    <p:extLst>
+      <p:ext uri="{BB962C8B-B14F-4D97-AF65-F5344CB8AC3E}">
+        <p14:creationId xmlns:p14="http://schemas.microsoft.com/office/powerpoint/2010/main" val="43337917"/>
+      </p:ext>
+    </p:extLst>
+  </p:cSld>
+  <p:clrMapOvr>
+    <a:masterClrMapping/>
+  </p:clrMapOvr>
+</p:sld>
+</file>
+
+<file path=ppt/slides/slide7.xml><?xml version="1.0" encoding="utf-8"?>
+<p:sld xmlns:a="http://schemas.openxmlformats.org/drawingml/2006/main" xmlns:r="http://schemas.openxmlformats.org/officeDocument/2006/relationships" xmlns:p="http://schemas.openxmlformats.org/presentationml/2006/main">
+  <p:cSld>
+    <p:spTree>
+      <p:nvGrpSpPr>
+        <p:cNvPr id="1" name="">
+          <a:extLst>
+            <a:ext uri="{FF2B5EF4-FFF2-40B4-BE49-F238E27FC236}">
+              <a16:creationId xmlns:a16="http://schemas.microsoft.com/office/drawing/2014/main" id="{E7B78ECD-3650-0D5D-E084-2ADF90776325}"/>
+            </a:ext>
+          </a:extLst>
+        </p:cNvPr>
+        <p:cNvGrpSpPr/>
+        <p:nvPr/>
+      </p:nvGrpSpPr>
+      <p:grpSpPr>
+        <a:xfrm>
+          <a:off x="0" y="0"/>
+          <a:ext cx="0" cy="0"/>
+          <a:chOff x="0" y="0"/>
+          <a:chExt cx="0" cy="0"/>
+        </a:xfrm>
+      </p:grpSpPr>
+      <p:sp>
+        <p:nvSpPr>
+          <p:cNvPr id="11" name="TextBox 10">
+            <a:extLst>
+              <a:ext uri="{FF2B5EF4-FFF2-40B4-BE49-F238E27FC236}">
+                <a16:creationId xmlns:a16="http://schemas.microsoft.com/office/drawing/2014/main" id="{2BF29A83-0331-0E10-824A-4833E4760B19}"/>
+              </a:ext>
+            </a:extLst>
+          </p:cNvPr>
+          <p:cNvSpPr txBox="1"/>
+          <p:nvPr/>
+        </p:nvSpPr>
+        <p:spPr>
+          <a:xfrm>
+            <a:off x="520861" y="170082"/>
+            <a:ext cx="16700339" cy="1107996"/>
+          </a:xfrm>
+          <a:prstGeom prst="rect">
+            <a:avLst/>
+          </a:prstGeom>
+          <a:noFill/>
+        </p:spPr>
+        <p:txBody>
+          <a:bodyPr wrap="square" rtlCol="0">
+            <a:spAutoFit/>
+          </a:bodyPr>
+          <a:lstStyle/>
+          <a:p>
+            <a:r>
+              <a:rPr lang="en-US" sz="6600" dirty="0">
+                <a:latin typeface="Aliens &amp; cows" panose="00000500000000000000" pitchFamily="2" charset="0"/>
+              </a:rPr>
+              <a:t>Day 5 preview: The intelligence layer with Excel</a:t>
+            </a:r>
+          </a:p>
+        </p:txBody>
+      </p:sp>
+      <p:sp>
+        <p:nvSpPr>
+          <p:cNvPr id="3" name="TextBox 2">
+            <a:extLst>
+              <a:ext uri="{FF2B5EF4-FFF2-40B4-BE49-F238E27FC236}">
+                <a16:creationId xmlns:a16="http://schemas.microsoft.com/office/drawing/2014/main" id="{1F8BFEA8-EC1E-D186-8530-6533D3345701}"/>
+              </a:ext>
+            </a:extLst>
+          </p:cNvPr>
+          <p:cNvSpPr txBox="1"/>
+          <p:nvPr/>
+        </p:nvSpPr>
+        <p:spPr>
+          <a:xfrm>
+            <a:off x="520861" y="2095500"/>
+            <a:ext cx="14393120" cy="6740307"/>
+          </a:xfrm>
+          <a:prstGeom prst="rect">
+            <a:avLst/>
+          </a:prstGeom>
+          <a:noFill/>
+        </p:spPr>
+        <p:txBody>
+          <a:bodyPr wrap="square" rtlCol="0">
+            <a:spAutoFit/>
+          </a:bodyPr>
+          <a:lstStyle/>
+          <a:p>
+            <a:pPr marL="685800" indent="-685800">
+              <a:buClr>
+                <a:srgbClr val="CF3338"/>
+              </a:buClr>
+              <a:buFont typeface="Arial" panose="020B0604020202020204" pitchFamily="34" charset="0"/>
+              <a:buChar char="•"/>
+            </a:pPr>
+            <a:r>
+              <a:rPr lang="en-US" sz="5400" dirty="0">
+                <a:solidFill>
+                  <a:srgbClr val="707070"/>
+                </a:solidFill>
+                <a:latin typeface="Pragmatica" panose="020B0403040502020204" pitchFamily="34" charset="0"/>
+              </a:rPr>
+              <a:t>Build your own Copilot for your team or department.</a:t>
+            </a:r>
+          </a:p>
+          <a:p>
+            <a:pPr marL="685800" indent="-685800">
+              <a:buClr>
+                <a:srgbClr val="CF3338"/>
+              </a:buClr>
+              <a:buFont typeface="Arial" panose="020B0604020202020204" pitchFamily="34" charset="0"/>
+              <a:buChar char="•"/>
+            </a:pPr>
+            <a:r>
+              <a:rPr lang="en-US" sz="5400" dirty="0">
+                <a:solidFill>
+                  <a:srgbClr val="707070"/>
+                </a:solidFill>
+                <a:latin typeface="Pragmatica" panose="020B0403040502020204" pitchFamily="34" charset="0"/>
+              </a:rPr>
+              <a:t>Connect it to Excel, Power Automate, Teams, and your data.</a:t>
+            </a:r>
+          </a:p>
+          <a:p>
+            <a:pPr marL="685800" indent="-685800">
+              <a:buClr>
+                <a:srgbClr val="CF3338"/>
+              </a:buClr>
+              <a:buFont typeface="Arial" panose="020B0604020202020204" pitchFamily="34" charset="0"/>
+              <a:buChar char="•"/>
+            </a:pPr>
+            <a:r>
+              <a:rPr lang="en-US" sz="5400" dirty="0">
+                <a:solidFill>
+                  <a:srgbClr val="707070"/>
+                </a:solidFill>
+                <a:latin typeface="Pragmatica" panose="020B0403040502020204" pitchFamily="34" charset="0"/>
+              </a:rPr>
+              <a:t>See how your Scripts + Flows become actions your Copilot can call.</a:t>
+            </a:r>
+          </a:p>
+          <a:p>
+            <a:pPr marL="685800" indent="-685800">
+              <a:buClr>
+                <a:srgbClr val="CF3338"/>
+              </a:buClr>
+              <a:buFont typeface="Arial" panose="020B0604020202020204" pitchFamily="34" charset="0"/>
+              <a:buChar char="•"/>
+            </a:pPr>
+            <a:r>
+              <a:rPr lang="en-US" sz="5400" dirty="0">
+                <a:solidFill>
+                  <a:srgbClr val="707070"/>
+                </a:solidFill>
+                <a:latin typeface="Pragmatica" panose="020B0403040502020204" pitchFamily="34" charset="0"/>
+              </a:rPr>
+              <a:t>Learn the orchestration layer, where AI starts coordinating your whole workflow.</a:t>
+            </a:r>
+          </a:p>
+        </p:txBody>
+      </p:sp>
+      <p:pic>
+        <p:nvPicPr>
+          <p:cNvPr id="15" name="Picture 14" descr="A close up of a sign&#10;&#10;Description automatically generated">
+            <a:extLst>
+              <a:ext uri="{FF2B5EF4-FFF2-40B4-BE49-F238E27FC236}">
+                <a16:creationId xmlns:a16="http://schemas.microsoft.com/office/drawing/2014/main" id="{49376407-AE9F-CCBA-4232-9DA21ADE632E}"/>
+              </a:ext>
+            </a:extLst>
+          </p:cNvPr>
+          <p:cNvPicPr>
+            <a:picLocks noChangeAspect="1"/>
+          </p:cNvPicPr>
+          <p:nvPr/>
+        </p:nvPicPr>
+        <p:blipFill>
+          <a:blip r:embed="rId3">
+            <a:extLst>
+              <a:ext uri="{28A0092B-C50C-407E-A947-70E740481C1C}">
+                <a14:useLocalDpi xmlns:a14="http://schemas.microsoft.com/office/drawing/2010/main" val="0"/>
+              </a:ext>
+            </a:extLst>
+          </a:blip>
+          <a:stretch>
+            <a:fillRect/>
+          </a:stretch>
+        </p:blipFill>
+        <p:spPr>
+          <a:xfrm>
+            <a:off x="16341036" y="8058429"/>
+            <a:ext cx="1942857" cy="2228571"/>
+          </a:xfrm>
+          <a:prstGeom prst="rect">
+            <a:avLst/>
+          </a:prstGeom>
+        </p:spPr>
+      </p:pic>
+    </p:spTree>
+    <p:extLst>
+      <p:ext uri="{BB962C8B-B14F-4D97-AF65-F5344CB8AC3E}">
+        <p14:creationId xmlns:p14="http://schemas.microsoft.com/office/powerpoint/2010/main" val="2946292221"/>
+      </p:ext>
+    </p:extLst>
+  </p:cSld>
+  <p:clrMapOvr>
+    <a:masterClrMapping/>
+  </p:clrMapOvr>
+</p:sld>
+</file>
+
+<file path=ppt/slides/slide8.xml><?xml version="1.0" encoding="utf-8"?>
+<p:sld xmlns:a="http://schemas.openxmlformats.org/drawingml/2006/main" xmlns:r="http://schemas.openxmlformats.org/officeDocument/2006/relationships" xmlns:p="http://schemas.openxmlformats.org/presentationml/2006/main">
+  <p:cSld>
+    <p:spTree>
+      <p:nvGrpSpPr>
+        <p:cNvPr id="1" name=""/>
+        <p:cNvGrpSpPr/>
+        <p:nvPr/>
+      </p:nvGrpSpPr>
+      <p:grpSpPr>
+        <a:xfrm>
+          <a:off x="0" y="0"/>
+          <a:ext cx="0" cy="0"/>
+          <a:chOff x="0" y="0"/>
+          <a:chExt cx="0" cy="0"/>
+        </a:xfrm>
+      </p:grpSpPr>
+      <p:pic>
+        <p:nvPicPr>
+          <p:cNvPr id="10" name="Picture 9"/>
+          <p:cNvPicPr>
+            <a:picLocks noChangeAspect="1"/>
+          </p:cNvPicPr>
+          <p:nvPr/>
+        </p:nvPicPr>
+        <p:blipFill rotWithShape="1">
+          <a:blip r:embed="rId2">
+            <a:extLst>
+              <a:ext uri="{28A0092B-C50C-407E-A947-70E740481C1C}">
+                <a14:useLocalDpi xmlns:a14="http://schemas.microsoft.com/office/drawing/2010/main" val="0"/>
+              </a:ext>
+            </a:extLst>
+          </a:blip>
+          <a:srcRect l="50728" t="56371"/>
+          <a:stretch/>
+        </p:blipFill>
+        <p:spPr>
+          <a:xfrm>
+            <a:off x="12204691" y="3316148"/>
+            <a:ext cx="6083309" cy="6970854"/>
+          </a:xfrm>
+          <a:prstGeom prst="rect">
+            <a:avLst/>
+          </a:prstGeom>
+        </p:spPr>
+      </p:pic>
+      <p:pic>
+        <p:nvPicPr>
+          <p:cNvPr id="4" name="Picture 3"/>
+          <p:cNvPicPr>
+            <a:picLocks noChangeAspect="1"/>
+          </p:cNvPicPr>
+          <p:nvPr/>
+        </p:nvPicPr>
+        <p:blipFill>
+          <a:blip r:embed="rId3">
+            <a:extLst>
+              <a:ext uri="{28A0092B-C50C-407E-A947-70E740481C1C}">
+                <a14:useLocalDpi xmlns:a14="http://schemas.microsoft.com/office/drawing/2010/main" val="0"/>
+              </a:ext>
+            </a:extLst>
+          </a:blip>
+          <a:stretch>
+            <a:fillRect/>
+          </a:stretch>
+        </p:blipFill>
+        <p:spPr>
+          <a:xfrm>
+            <a:off x="-807744" y="-3724155"/>
+            <a:ext cx="15257208" cy="11189825"/>
+          </a:xfrm>
+          <a:prstGeom prst="rect">
+            <a:avLst/>
+          </a:prstGeom>
+        </p:spPr>
+      </p:pic>
+      <p:sp>
+        <p:nvSpPr>
+          <p:cNvPr id="11" name="TextBox 10"/>
+          <p:cNvSpPr txBox="1"/>
+          <p:nvPr/>
+        </p:nvSpPr>
+        <p:spPr>
+          <a:xfrm>
+            <a:off x="486137" y="2531318"/>
+            <a:ext cx="11979797" cy="923330"/>
+          </a:xfrm>
+          <a:prstGeom prst="rect">
+            <a:avLst/>
+          </a:prstGeom>
+          <a:noFill/>
+        </p:spPr>
+        <p:txBody>
+          <a:bodyPr wrap="square" rtlCol="0">
+            <a:spAutoFit/>
+          </a:bodyPr>
+          <a:lstStyle/>
+          <a:p>
+            <a:r>
+              <a:rPr lang="en-US" sz="5400" b="1" dirty="0">
+                <a:solidFill>
+                  <a:srgbClr val="CF3338"/>
+                </a:solidFill>
+                <a:latin typeface="Pragmatica" panose="020B0403040502020204" pitchFamily="34" charset="0"/>
+              </a:rPr>
+              <a:t>Questions?</a:t>
+            </a:r>
+          </a:p>
+        </p:txBody>
+      </p:sp>
+      <p:pic>
+        <p:nvPicPr>
+          <p:cNvPr id="5" name="Picture 4">
+            <a:extLst>
+              <a:ext uri="{FF2B5EF4-FFF2-40B4-BE49-F238E27FC236}">
+                <a16:creationId xmlns:a16="http://schemas.microsoft.com/office/drawing/2014/main" id="{54A06221-5316-4BCF-9FDA-BDB95FF4A778}"/>
+              </a:ext>
+            </a:extLst>
+          </p:cNvPr>
+          <p:cNvPicPr>
+            <a:picLocks noChangeAspect="1"/>
+          </p:cNvPicPr>
+          <p:nvPr/>
+        </p:nvPicPr>
+        <p:blipFill>
+          <a:blip r:embed="rId4">
+            <a:extLst>
+              <a:ext uri="{28A0092B-C50C-407E-A947-70E740481C1C}">
+                <a14:useLocalDpi xmlns:a14="http://schemas.microsoft.com/office/drawing/2010/main" val="0"/>
+              </a:ext>
+            </a:extLst>
+          </a:blip>
+          <a:srcRect/>
+          <a:stretch/>
+        </p:blipFill>
+        <p:spPr>
+          <a:xfrm>
+            <a:off x="12204691" y="3317239"/>
+            <a:ext cx="6083309" cy="6968672"/>
+          </a:xfrm>
+          <a:prstGeom prst="rect">
+            <a:avLst/>
+          </a:prstGeom>
+        </p:spPr>
+      </p:pic>
+    </p:spTree>
+    <p:extLst>
+      <p:ext uri="{BB962C8B-B14F-4D97-AF65-F5344CB8AC3E}">
+        <p14:creationId xmlns:p14="http://schemas.microsoft.com/office/powerpoint/2010/main" val="1689860732"/>
+      </p:ext>
+    </p:extLst>
+  </p:cSld>
+  <p:clrMapOvr>
+    <a:masterClrMapping/>
+  </p:clrMapOvr>
+</p:sld>
+</file>
+
+<file path=ppt/slides/slide9.xml><?xml version="1.0" encoding="utf-8"?>
 <p:sld xmlns:a="http://schemas.openxmlformats.org/drawingml/2006/main" xmlns:r="http://schemas.openxmlformats.org/officeDocument/2006/relationships" xmlns:p="http://schemas.openxmlformats.org/presentationml/2006/main">
   <p:cSld>
     <p:spTree>
@@ -4584,1779 +6037,6 @@
     <p:extLst>
       <p:ext uri="{BB962C8B-B14F-4D97-AF65-F5344CB8AC3E}">
         <p14:creationId xmlns:p14="http://schemas.microsoft.com/office/powerpoint/2010/main" val="709344641"/>
-      </p:ext>
-    </p:extLst>
-  </p:cSld>
-  <p:clrMapOvr>
-    <a:masterClrMapping/>
-  </p:clrMapOvr>
-</p:sld>
-</file>
-
-<file path=ppt/slides/slide2.xml><?xml version="1.0" encoding="utf-8"?>
-<p:sld xmlns:a="http://schemas.openxmlformats.org/drawingml/2006/main" xmlns:r="http://schemas.openxmlformats.org/officeDocument/2006/relationships" xmlns:p="http://schemas.openxmlformats.org/presentationml/2006/main">
-  <p:cSld>
-    <p:spTree>
-      <p:nvGrpSpPr>
-        <p:cNvPr id="1" name="">
-          <a:extLst>
-            <a:ext uri="{FF2B5EF4-FFF2-40B4-BE49-F238E27FC236}">
-              <a16:creationId xmlns:a16="http://schemas.microsoft.com/office/drawing/2014/main" id="{B016697A-2DDC-AD06-0D5F-524946CCFA3B}"/>
-            </a:ext>
-          </a:extLst>
-        </p:cNvPr>
-        <p:cNvGrpSpPr/>
-        <p:nvPr/>
-      </p:nvGrpSpPr>
-      <p:grpSpPr>
-        <a:xfrm>
-          <a:off x="0" y="0"/>
-          <a:ext cx="0" cy="0"/>
-          <a:chOff x="0" y="0"/>
-          <a:chExt cx="0" cy="0"/>
-        </a:xfrm>
-      </p:grpSpPr>
-      <p:sp>
-        <p:nvSpPr>
-          <p:cNvPr id="11" name="TextBox 10">
-            <a:extLst>
-              <a:ext uri="{FF2B5EF4-FFF2-40B4-BE49-F238E27FC236}">
-                <a16:creationId xmlns:a16="http://schemas.microsoft.com/office/drawing/2014/main" id="{0E25D70B-1F78-7AF8-4771-7B64B436CB0F}"/>
-              </a:ext>
-            </a:extLst>
-          </p:cNvPr>
-          <p:cNvSpPr txBox="1"/>
-          <p:nvPr/>
-        </p:nvSpPr>
-        <p:spPr>
-          <a:xfrm>
-            <a:off x="520861" y="170082"/>
-            <a:ext cx="14642939" cy="1477328"/>
-          </a:xfrm>
-          <a:prstGeom prst="rect">
-            <a:avLst/>
-          </a:prstGeom>
-          <a:noFill/>
-        </p:spPr>
-        <p:txBody>
-          <a:bodyPr wrap="square" rtlCol="0">
-            <a:spAutoFit/>
-          </a:bodyPr>
-          <a:lstStyle/>
-          <a:p>
-            <a:r>
-              <a:rPr lang="en-US" sz="9000" dirty="0">
-                <a:latin typeface="Aliens &amp; cows" panose="00000500000000000000" pitchFamily="2" charset="0"/>
-              </a:rPr>
-              <a:t>Class logistics</a:t>
-            </a:r>
-          </a:p>
-        </p:txBody>
-      </p:sp>
-      <p:sp>
-        <p:nvSpPr>
-          <p:cNvPr id="3" name="TextBox 2">
-            <a:extLst>
-              <a:ext uri="{FF2B5EF4-FFF2-40B4-BE49-F238E27FC236}">
-                <a16:creationId xmlns:a16="http://schemas.microsoft.com/office/drawing/2014/main" id="{8AD5976A-E96C-DF78-2D1D-42CD64D3E69F}"/>
-              </a:ext>
-            </a:extLst>
-          </p:cNvPr>
-          <p:cNvSpPr txBox="1"/>
-          <p:nvPr/>
-        </p:nvSpPr>
-        <p:spPr>
-          <a:xfrm>
-            <a:off x="520861" y="3191948"/>
-            <a:ext cx="14393120" cy="5078313"/>
-          </a:xfrm>
-          <a:prstGeom prst="rect">
-            <a:avLst/>
-          </a:prstGeom>
-          <a:noFill/>
-        </p:spPr>
-        <p:txBody>
-          <a:bodyPr wrap="square" rtlCol="0">
-            <a:spAutoFit/>
-          </a:bodyPr>
-          <a:lstStyle/>
-          <a:p>
-            <a:pPr marL="685800" indent="-685800">
-              <a:buClr>
-                <a:srgbClr val="CF3338"/>
-              </a:buClr>
-              <a:buFont typeface="Arial" panose="020B0604020202020204" pitchFamily="34" charset="0"/>
-              <a:buChar char="•"/>
-            </a:pPr>
-            <a:r>
-              <a:rPr lang="en-US" sz="5400" dirty="0">
-                <a:solidFill>
-                  <a:srgbClr val="707070"/>
-                </a:solidFill>
-                <a:latin typeface="Pragmatica" panose="020B0403040502020204" pitchFamily="34" charset="0"/>
-              </a:rPr>
-              <a:t>All recordings, files used and communication will be on Teams channel</a:t>
-            </a:r>
-          </a:p>
-          <a:p>
-            <a:pPr marL="1143000" lvl="1" indent="-685800">
-              <a:buClr>
-                <a:srgbClr val="CF3338"/>
-              </a:buClr>
-              <a:buFont typeface="Arial" panose="020B0604020202020204" pitchFamily="34" charset="0"/>
-              <a:buChar char="•"/>
-            </a:pPr>
-            <a:r>
-              <a:rPr lang="en-US" sz="5400" dirty="0">
-                <a:solidFill>
-                  <a:srgbClr val="707070"/>
-                </a:solidFill>
-                <a:latin typeface="Pragmatica" panose="020B0403040502020204" pitchFamily="34" charset="0"/>
-              </a:rPr>
-              <a:t>Be sure to use your email used to sign up for the course!</a:t>
-            </a:r>
-          </a:p>
-          <a:p>
-            <a:pPr marL="1143000" lvl="1" indent="-685800">
-              <a:buClr>
-                <a:srgbClr val="CF3338"/>
-              </a:buClr>
-              <a:buFont typeface="Arial" panose="020B0604020202020204" pitchFamily="34" charset="0"/>
-              <a:buChar char="•"/>
-            </a:pPr>
-            <a:r>
-              <a:rPr lang="en-US" sz="5400" dirty="0">
-                <a:solidFill>
-                  <a:srgbClr val="707070"/>
-                </a:solidFill>
-                <a:latin typeface="Pragmatica" panose="020B0403040502020204" pitchFamily="34" charset="0"/>
-              </a:rPr>
-              <a:t>Email me with any questions: </a:t>
-            </a:r>
-            <a:r>
-              <a:rPr lang="en-US" sz="5400" b="1" dirty="0">
-                <a:solidFill>
-                  <a:srgbClr val="707070"/>
-                </a:solidFill>
-                <a:latin typeface="Pragmatica" panose="020B0403040502020204" pitchFamily="34" charset="0"/>
-              </a:rPr>
-              <a:t>george@stringfestanalytics.com </a:t>
-            </a:r>
-          </a:p>
-        </p:txBody>
-      </p:sp>
-      <p:pic>
-        <p:nvPicPr>
-          <p:cNvPr id="15" name="Picture 14" descr="A close up of a sign&#10;&#10;Description automatically generated">
-            <a:extLst>
-              <a:ext uri="{FF2B5EF4-FFF2-40B4-BE49-F238E27FC236}">
-                <a16:creationId xmlns:a16="http://schemas.microsoft.com/office/drawing/2014/main" id="{56BC9DC3-5856-1F48-F0BE-E6FB589534FC}"/>
-              </a:ext>
-            </a:extLst>
-          </p:cNvPr>
-          <p:cNvPicPr>
-            <a:picLocks noChangeAspect="1"/>
-          </p:cNvPicPr>
-          <p:nvPr/>
-        </p:nvPicPr>
-        <p:blipFill>
-          <a:blip r:embed="rId2">
-            <a:extLst>
-              <a:ext uri="{28A0092B-C50C-407E-A947-70E740481C1C}">
-                <a14:useLocalDpi xmlns:a14="http://schemas.microsoft.com/office/drawing/2010/main" val="0"/>
-              </a:ext>
-            </a:extLst>
-          </a:blip>
-          <a:stretch>
-            <a:fillRect/>
-          </a:stretch>
-        </p:blipFill>
-        <p:spPr>
-          <a:xfrm>
-            <a:off x="16341036" y="8058429"/>
-            <a:ext cx="1942857" cy="2228571"/>
-          </a:xfrm>
-          <a:prstGeom prst="rect">
-            <a:avLst/>
-          </a:prstGeom>
-        </p:spPr>
-      </p:pic>
-    </p:spTree>
-    <p:extLst>
-      <p:ext uri="{BB962C8B-B14F-4D97-AF65-F5344CB8AC3E}">
-        <p14:creationId xmlns:p14="http://schemas.microsoft.com/office/powerpoint/2010/main" val="3740785016"/>
-      </p:ext>
-    </p:extLst>
-  </p:cSld>
-  <p:clrMapOvr>
-    <a:masterClrMapping/>
-  </p:clrMapOvr>
-</p:sld>
-</file>
-
-<file path=ppt/slides/slide3.xml><?xml version="1.0" encoding="utf-8"?>
-<p:sld xmlns:a="http://schemas.openxmlformats.org/drawingml/2006/main" xmlns:r="http://schemas.openxmlformats.org/officeDocument/2006/relationships" xmlns:p="http://schemas.openxmlformats.org/presentationml/2006/main">
-  <p:cSld>
-    <p:spTree>
-      <p:nvGrpSpPr>
-        <p:cNvPr id="1" name="">
-          <a:extLst>
-            <a:ext uri="{FF2B5EF4-FFF2-40B4-BE49-F238E27FC236}">
-              <a16:creationId xmlns:a16="http://schemas.microsoft.com/office/drawing/2014/main" id="{58E778E5-4EE9-9207-6FC7-3D28CF2383AD}"/>
-            </a:ext>
-          </a:extLst>
-        </p:cNvPr>
-        <p:cNvGrpSpPr/>
-        <p:nvPr/>
-      </p:nvGrpSpPr>
-      <p:grpSpPr>
-        <a:xfrm>
-          <a:off x="0" y="0"/>
-          <a:ext cx="0" cy="0"/>
-          <a:chOff x="0" y="0"/>
-          <a:chExt cx="0" cy="0"/>
-        </a:xfrm>
-      </p:grpSpPr>
-      <p:sp>
-        <p:nvSpPr>
-          <p:cNvPr id="11" name="TextBox 10">
-            <a:extLst>
-              <a:ext uri="{FF2B5EF4-FFF2-40B4-BE49-F238E27FC236}">
-                <a16:creationId xmlns:a16="http://schemas.microsoft.com/office/drawing/2014/main" id="{781603C7-76CD-A76B-F955-68F3329D8967}"/>
-              </a:ext>
-            </a:extLst>
-          </p:cNvPr>
-          <p:cNvSpPr txBox="1"/>
-          <p:nvPr/>
-        </p:nvSpPr>
-        <p:spPr>
-          <a:xfrm>
-            <a:off x="520861" y="170082"/>
-            <a:ext cx="14642939" cy="1477328"/>
-          </a:xfrm>
-          <a:prstGeom prst="rect">
-            <a:avLst/>
-          </a:prstGeom>
-          <a:noFill/>
-        </p:spPr>
-        <p:txBody>
-          <a:bodyPr wrap="square" rtlCol="0">
-            <a:spAutoFit/>
-          </a:bodyPr>
-          <a:lstStyle/>
-          <a:p>
-            <a:r>
-              <a:rPr lang="en-US" sz="9000" dirty="0">
-                <a:latin typeface="Aliens &amp; cows" panose="00000500000000000000" pitchFamily="2" charset="0"/>
-              </a:rPr>
-              <a:t>Recap of Day 3</a:t>
-            </a:r>
-          </a:p>
-        </p:txBody>
-      </p:sp>
-      <p:sp>
-        <p:nvSpPr>
-          <p:cNvPr id="3" name="TextBox 2">
-            <a:extLst>
-              <a:ext uri="{FF2B5EF4-FFF2-40B4-BE49-F238E27FC236}">
-                <a16:creationId xmlns:a16="http://schemas.microsoft.com/office/drawing/2014/main" id="{5F84214C-EACA-355D-FAEB-44DBEAE3040B}"/>
-              </a:ext>
-            </a:extLst>
-          </p:cNvPr>
-          <p:cNvSpPr txBox="1"/>
-          <p:nvPr/>
-        </p:nvSpPr>
-        <p:spPr>
-          <a:xfrm>
-            <a:off x="520861" y="2095500"/>
-            <a:ext cx="14393120" cy="5078313"/>
-          </a:xfrm>
-          <a:prstGeom prst="rect">
-            <a:avLst/>
-          </a:prstGeom>
-          <a:noFill/>
-        </p:spPr>
-        <p:txBody>
-          <a:bodyPr wrap="square" rtlCol="0">
-            <a:spAutoFit/>
-          </a:bodyPr>
-          <a:lstStyle/>
-          <a:p>
-            <a:pPr marL="685800" indent="-685800">
-              <a:buClr>
-                <a:srgbClr val="CF3338"/>
-              </a:buClr>
-              <a:buFont typeface="Arial" panose="020B0604020202020204" pitchFamily="34" charset="0"/>
-              <a:buChar char="•"/>
-            </a:pPr>
-            <a:r>
-              <a:rPr lang="en-US" sz="5400" dirty="0">
-                <a:solidFill>
-                  <a:srgbClr val="707070"/>
-                </a:solidFill>
-                <a:latin typeface="Pragmatica" panose="020B0403040502020204" pitchFamily="34" charset="0"/>
-              </a:rPr>
-              <a:t>Copilot for formulas, charts, and insights</a:t>
-            </a:r>
-          </a:p>
-          <a:p>
-            <a:pPr marL="685800" indent="-685800">
-              <a:buClr>
-                <a:srgbClr val="CF3338"/>
-              </a:buClr>
-              <a:buFont typeface="Arial" panose="020B0604020202020204" pitchFamily="34" charset="0"/>
-              <a:buChar char="•"/>
-            </a:pPr>
-            <a:r>
-              <a:rPr lang="en-US" sz="5400" dirty="0">
-                <a:solidFill>
-                  <a:srgbClr val="707070"/>
-                </a:solidFill>
-                <a:latin typeface="Pragmatica" panose="020B0403040502020204" pitchFamily="34" charset="0"/>
-              </a:rPr>
-              <a:t>Python for analysis and forecasting</a:t>
-            </a:r>
-          </a:p>
-          <a:p>
-            <a:pPr marL="685800" indent="-685800">
-              <a:buClr>
-                <a:srgbClr val="CF3338"/>
-              </a:buClr>
-              <a:buFont typeface="Arial" panose="020B0604020202020204" pitchFamily="34" charset="0"/>
-              <a:buChar char="•"/>
-            </a:pPr>
-            <a:r>
-              <a:rPr lang="en-US" sz="5400" dirty="0">
-                <a:solidFill>
-                  <a:srgbClr val="707070"/>
-                </a:solidFill>
-                <a:latin typeface="Pragmatica" panose="020B0403040502020204" pitchFamily="34" charset="0"/>
-              </a:rPr>
-              <a:t>Agent Mode for multi step tasks</a:t>
-            </a:r>
-          </a:p>
-          <a:p>
-            <a:pPr marL="685800" indent="-685800">
-              <a:buClr>
-                <a:srgbClr val="CF3338"/>
-              </a:buClr>
-              <a:buFont typeface="Arial" panose="020B0604020202020204" pitchFamily="34" charset="0"/>
-              <a:buChar char="•"/>
-            </a:pPr>
-            <a:r>
-              <a:rPr lang="en-US" sz="5400" dirty="0">
-                <a:solidFill>
-                  <a:srgbClr val="707070"/>
-                </a:solidFill>
-                <a:latin typeface="Pragmatica" panose="020B0403040502020204" pitchFamily="34" charset="0"/>
-              </a:rPr>
-              <a:t>Excel is now an intelligent workspace</a:t>
-            </a:r>
-          </a:p>
-          <a:p>
-            <a:pPr marL="685800" indent="-685800">
-              <a:buClr>
-                <a:srgbClr val="CF3338"/>
-              </a:buClr>
-              <a:buFont typeface="Arial" panose="020B0604020202020204" pitchFamily="34" charset="0"/>
-              <a:buChar char="•"/>
-            </a:pPr>
-            <a:r>
-              <a:rPr lang="en-US" sz="5400" dirty="0">
-                <a:solidFill>
-                  <a:srgbClr val="707070"/>
-                </a:solidFill>
-                <a:latin typeface="Pragmatica" panose="020B0403040502020204" pitchFamily="34" charset="0"/>
-              </a:rPr>
-              <a:t>But so what: how do you get data in, get results out, and connect it all?</a:t>
-            </a:r>
-          </a:p>
-        </p:txBody>
-      </p:sp>
-      <p:pic>
-        <p:nvPicPr>
-          <p:cNvPr id="15" name="Picture 14" descr="A close up of a sign&#10;&#10;Description automatically generated">
-            <a:extLst>
-              <a:ext uri="{FF2B5EF4-FFF2-40B4-BE49-F238E27FC236}">
-                <a16:creationId xmlns:a16="http://schemas.microsoft.com/office/drawing/2014/main" id="{6959BD9D-5738-BA78-737D-3115164D42C1}"/>
-              </a:ext>
-            </a:extLst>
-          </p:cNvPr>
-          <p:cNvPicPr>
-            <a:picLocks noChangeAspect="1"/>
-          </p:cNvPicPr>
-          <p:nvPr/>
-        </p:nvPicPr>
-        <p:blipFill>
-          <a:blip r:embed="rId3">
-            <a:extLst>
-              <a:ext uri="{28A0092B-C50C-407E-A947-70E740481C1C}">
-                <a14:useLocalDpi xmlns:a14="http://schemas.microsoft.com/office/drawing/2010/main" val="0"/>
-              </a:ext>
-            </a:extLst>
-          </a:blip>
-          <a:stretch>
-            <a:fillRect/>
-          </a:stretch>
-        </p:blipFill>
-        <p:spPr>
-          <a:xfrm>
-            <a:off x="16341036" y="8058429"/>
-            <a:ext cx="1942857" cy="2228571"/>
-          </a:xfrm>
-          <a:prstGeom prst="rect">
-            <a:avLst/>
-          </a:prstGeom>
-        </p:spPr>
-      </p:pic>
-    </p:spTree>
-    <p:extLst>
-      <p:ext uri="{BB962C8B-B14F-4D97-AF65-F5344CB8AC3E}">
-        <p14:creationId xmlns:p14="http://schemas.microsoft.com/office/powerpoint/2010/main" val="769688013"/>
-      </p:ext>
-    </p:extLst>
-  </p:cSld>
-  <p:clrMapOvr>
-    <a:masterClrMapping/>
-  </p:clrMapOvr>
-</p:sld>
-</file>
-
-<file path=ppt/slides/slide4.xml><?xml version="1.0" encoding="utf-8"?>
-<p:sld xmlns:a="http://schemas.openxmlformats.org/drawingml/2006/main" xmlns:r="http://schemas.openxmlformats.org/officeDocument/2006/relationships" xmlns:p="http://schemas.openxmlformats.org/presentationml/2006/main">
-  <p:cSld>
-    <p:spTree>
-      <p:nvGrpSpPr>
-        <p:cNvPr id="1" name="">
-          <a:extLst>
-            <a:ext uri="{FF2B5EF4-FFF2-40B4-BE49-F238E27FC236}">
-              <a16:creationId xmlns:a16="http://schemas.microsoft.com/office/drawing/2014/main" id="{B3E6ACC5-4B11-2B34-2998-BB1C4FC9CC6C}"/>
-            </a:ext>
-          </a:extLst>
-        </p:cNvPr>
-        <p:cNvGrpSpPr/>
-        <p:nvPr/>
-      </p:nvGrpSpPr>
-      <p:grpSpPr>
-        <a:xfrm>
-          <a:off x="0" y="0"/>
-          <a:ext cx="0" cy="0"/>
-          <a:chOff x="0" y="0"/>
-          <a:chExt cx="0" cy="0"/>
-        </a:xfrm>
-      </p:grpSpPr>
-      <p:sp>
-        <p:nvSpPr>
-          <p:cNvPr id="11" name="TextBox 10">
-            <a:extLst>
-              <a:ext uri="{FF2B5EF4-FFF2-40B4-BE49-F238E27FC236}">
-                <a16:creationId xmlns:a16="http://schemas.microsoft.com/office/drawing/2014/main" id="{EDA2185A-0457-8E44-DEEB-D9AF5A6DD844}"/>
-              </a:ext>
-            </a:extLst>
-          </p:cNvPr>
-          <p:cNvSpPr txBox="1"/>
-          <p:nvPr/>
-        </p:nvSpPr>
-        <p:spPr>
-          <a:xfrm>
-            <a:off x="520861" y="170082"/>
-            <a:ext cx="6794339" cy="3785652"/>
-          </a:xfrm>
-          <a:prstGeom prst="rect">
-            <a:avLst/>
-          </a:prstGeom>
-          <a:noFill/>
-        </p:spPr>
-        <p:txBody>
-          <a:bodyPr wrap="square" rtlCol="0">
-            <a:spAutoFit/>
-          </a:bodyPr>
-          <a:lstStyle/>
-          <a:p>
-            <a:r>
-              <a:rPr lang="en-US" sz="8000" dirty="0">
-                <a:latin typeface="Aliens &amp; cows" panose="00000500000000000000" pitchFamily="2" charset="0"/>
-              </a:rPr>
-              <a:t>Welcome to the modern Excel AI stack</a:t>
-            </a:r>
-          </a:p>
-        </p:txBody>
-      </p:sp>
-      <p:pic>
-        <p:nvPicPr>
-          <p:cNvPr id="15" name="Picture 14" descr="A close up of a sign&#10;&#10;Description automatically generated">
-            <a:extLst>
-              <a:ext uri="{FF2B5EF4-FFF2-40B4-BE49-F238E27FC236}">
-                <a16:creationId xmlns:a16="http://schemas.microsoft.com/office/drawing/2014/main" id="{B40CB128-54BB-AAD9-5F61-2143EA93C39E}"/>
-              </a:ext>
-            </a:extLst>
-          </p:cNvPr>
-          <p:cNvPicPr>
-            <a:picLocks noChangeAspect="1"/>
-          </p:cNvPicPr>
-          <p:nvPr/>
-        </p:nvPicPr>
-        <p:blipFill>
-          <a:blip r:embed="rId2">
-            <a:extLst>
-              <a:ext uri="{28A0092B-C50C-407E-A947-70E740481C1C}">
-                <a14:useLocalDpi xmlns:a14="http://schemas.microsoft.com/office/drawing/2010/main" val="0"/>
-              </a:ext>
-            </a:extLst>
-          </a:blip>
-          <a:stretch>
-            <a:fillRect/>
-          </a:stretch>
-        </p:blipFill>
-        <p:spPr>
-          <a:xfrm>
-            <a:off x="16341036" y="8058429"/>
-            <a:ext cx="1942857" cy="2228571"/>
-          </a:xfrm>
-          <a:prstGeom prst="rect">
-            <a:avLst/>
-          </a:prstGeom>
-        </p:spPr>
-      </p:pic>
-      <p:sp>
-        <p:nvSpPr>
-          <p:cNvPr id="4" name="TextBox 3">
-            <a:extLst>
-              <a:ext uri="{FF2B5EF4-FFF2-40B4-BE49-F238E27FC236}">
-                <a16:creationId xmlns:a16="http://schemas.microsoft.com/office/drawing/2014/main" id="{59AB6FFB-7FD0-7057-BC27-8C4B01CE34D2}"/>
-              </a:ext>
-            </a:extLst>
-          </p:cNvPr>
-          <p:cNvSpPr txBox="1"/>
-          <p:nvPr/>
-        </p:nvSpPr>
-        <p:spPr>
-          <a:xfrm>
-            <a:off x="228600" y="8267700"/>
-            <a:ext cx="6400800" cy="1569660"/>
-          </a:xfrm>
-          <a:prstGeom prst="rect">
-            <a:avLst/>
-          </a:prstGeom>
-          <a:noFill/>
-        </p:spPr>
-        <p:txBody>
-          <a:bodyPr wrap="square">
-            <a:spAutoFit/>
-          </a:bodyPr>
-          <a:lstStyle/>
-          <a:p>
-            <a:r>
-              <a:rPr lang="en-US" sz="3200" dirty="0">
-                <a:hlinkClick r:id="rId3"/>
-              </a:rPr>
-              <a:t>https://stringfestanalytics.com/how-to-understand-the-modern-excel-ai-stack/</a:t>
-            </a:r>
-            <a:r>
-              <a:rPr lang="en-US" sz="3200" dirty="0"/>
-              <a:t> </a:t>
-            </a:r>
-          </a:p>
-        </p:txBody>
-      </p:sp>
-      <p:pic>
-        <p:nvPicPr>
-          <p:cNvPr id="5" name="Picture 4">
-            <a:extLst>
-              <a:ext uri="{FF2B5EF4-FFF2-40B4-BE49-F238E27FC236}">
-                <a16:creationId xmlns:a16="http://schemas.microsoft.com/office/drawing/2014/main" id="{B9D87183-BF8B-3C89-D59E-109566F38D46}"/>
-              </a:ext>
-            </a:extLst>
-          </p:cNvPr>
-          <p:cNvPicPr>
-            <a:picLocks noChangeAspect="1"/>
-          </p:cNvPicPr>
-          <p:nvPr/>
-        </p:nvPicPr>
-        <p:blipFill>
-          <a:blip r:embed="rId4"/>
-          <a:stretch>
-            <a:fillRect/>
-          </a:stretch>
-        </p:blipFill>
-        <p:spPr>
-          <a:xfrm>
-            <a:off x="8001000" y="0"/>
-            <a:ext cx="10287000" cy="10287000"/>
-          </a:xfrm>
-          <a:prstGeom prst="rect">
-            <a:avLst/>
-          </a:prstGeom>
-        </p:spPr>
-      </p:pic>
-      <p:sp>
-        <p:nvSpPr>
-          <p:cNvPr id="2" name="Rectangle 1">
-            <a:extLst>
-              <a:ext uri="{FF2B5EF4-FFF2-40B4-BE49-F238E27FC236}">
-                <a16:creationId xmlns:a16="http://schemas.microsoft.com/office/drawing/2014/main" id="{2A65A1F1-433D-842C-ED33-95F0AF974DBB}"/>
-              </a:ext>
-            </a:extLst>
-          </p:cNvPr>
-          <p:cNvSpPr/>
-          <p:nvPr/>
-        </p:nvSpPr>
-        <p:spPr>
-          <a:xfrm>
-            <a:off x="8839200" y="3467100"/>
-            <a:ext cx="8610600" cy="1524000"/>
-          </a:xfrm>
-          <a:prstGeom prst="rect">
-            <a:avLst/>
-          </a:prstGeom>
-          <a:noFill/>
-          <a:ln w="76200">
-            <a:solidFill>
-              <a:srgbClr val="CF3338"/>
-            </a:solidFill>
-          </a:ln>
-        </p:spPr>
-        <p:style>
-          <a:lnRef idx="2">
-            <a:schemeClr val="accent1">
-              <a:shade val="15000"/>
-            </a:schemeClr>
-          </a:lnRef>
-          <a:fillRef idx="1">
-            <a:schemeClr val="accent1"/>
-          </a:fillRef>
-          <a:effectRef idx="0">
-            <a:schemeClr val="accent1"/>
-          </a:effectRef>
-          <a:fontRef idx="minor">
-            <a:schemeClr val="lt1"/>
-          </a:fontRef>
-        </p:style>
-        <p:txBody>
-          <a:bodyPr rtlCol="0" anchor="ctr"/>
-          <a:lstStyle/>
-          <a:p>
-            <a:pPr algn="ctr"/>
-            <a:endParaRPr lang="en-US"/>
-          </a:p>
-        </p:txBody>
-      </p:sp>
-    </p:spTree>
-    <p:extLst>
-      <p:ext uri="{BB962C8B-B14F-4D97-AF65-F5344CB8AC3E}">
-        <p14:creationId xmlns:p14="http://schemas.microsoft.com/office/powerpoint/2010/main" val="2791422705"/>
-      </p:ext>
-    </p:extLst>
-  </p:cSld>
-  <p:clrMapOvr>
-    <a:masterClrMapping/>
-  </p:clrMapOvr>
-</p:sld>
-</file>
-
-<file path=ppt/slides/slide5.xml><?xml version="1.0" encoding="utf-8"?>
-<p:sld xmlns:a="http://schemas.openxmlformats.org/drawingml/2006/main" xmlns:r="http://schemas.openxmlformats.org/officeDocument/2006/relationships" xmlns:p="http://schemas.openxmlformats.org/presentationml/2006/main">
-  <p:cSld>
-    <p:spTree>
-      <p:nvGrpSpPr>
-        <p:cNvPr id="1" name="">
-          <a:extLst>
-            <a:ext uri="{FF2B5EF4-FFF2-40B4-BE49-F238E27FC236}">
-              <a16:creationId xmlns:a16="http://schemas.microsoft.com/office/drawing/2014/main" id="{B245543C-FC2F-706C-0319-AF2E02C1797B}"/>
-            </a:ext>
-          </a:extLst>
-        </p:cNvPr>
-        <p:cNvGrpSpPr/>
-        <p:nvPr/>
-      </p:nvGrpSpPr>
-      <p:grpSpPr>
-        <a:xfrm>
-          <a:off x="0" y="0"/>
-          <a:ext cx="0" cy="0"/>
-          <a:chOff x="0" y="0"/>
-          <a:chExt cx="0" cy="0"/>
-        </a:xfrm>
-      </p:grpSpPr>
-      <p:sp>
-        <p:nvSpPr>
-          <p:cNvPr id="4" name="Rectangle 3">
-            <a:extLst>
-              <a:ext uri="{FF2B5EF4-FFF2-40B4-BE49-F238E27FC236}">
-                <a16:creationId xmlns:a16="http://schemas.microsoft.com/office/drawing/2014/main" id="{490E9BB0-DF62-7CD8-AD9E-9B07D47A3EA3}"/>
-              </a:ext>
-            </a:extLst>
-          </p:cNvPr>
-          <p:cNvSpPr/>
-          <p:nvPr/>
-        </p:nvSpPr>
-        <p:spPr>
-          <a:xfrm>
-            <a:off x="9861630" y="0"/>
-            <a:ext cx="8426370" cy="10287000"/>
-          </a:xfrm>
-          <a:prstGeom prst="rect">
-            <a:avLst/>
-          </a:prstGeom>
-          <a:solidFill>
-            <a:srgbClr val="CF3338"/>
-          </a:solidFill>
-          <a:ln>
-            <a:noFill/>
-          </a:ln>
-        </p:spPr>
-        <p:style>
-          <a:lnRef idx="2">
-            <a:schemeClr val="accent1">
-              <a:shade val="50000"/>
-            </a:schemeClr>
-          </a:lnRef>
-          <a:fillRef idx="1">
-            <a:schemeClr val="accent1"/>
-          </a:fillRef>
-          <a:effectRef idx="0">
-            <a:schemeClr val="accent1"/>
-          </a:effectRef>
-          <a:fontRef idx="minor">
-            <a:schemeClr val="lt1"/>
-          </a:fontRef>
-        </p:style>
-        <p:txBody>
-          <a:bodyPr rtlCol="0" anchor="ctr"/>
-          <a:lstStyle/>
-          <a:p>
-            <a:pPr algn="ctr"/>
-            <a:endParaRPr lang="en-US" sz="2700"/>
-          </a:p>
-        </p:txBody>
-      </p:sp>
-      <p:pic>
-        <p:nvPicPr>
-          <p:cNvPr id="2" name="Picture 1">
-            <a:extLst>
-              <a:ext uri="{FF2B5EF4-FFF2-40B4-BE49-F238E27FC236}">
-                <a16:creationId xmlns:a16="http://schemas.microsoft.com/office/drawing/2014/main" id="{75EAA4D7-8279-B257-6D3E-F96D3198579A}"/>
-              </a:ext>
-            </a:extLst>
-          </p:cNvPr>
-          <p:cNvPicPr>
-            <a:picLocks noChangeAspect="1"/>
-          </p:cNvPicPr>
-          <p:nvPr/>
-        </p:nvPicPr>
-        <p:blipFill rotWithShape="1">
-          <a:blip r:embed="rId3">
-            <a:extLst>
-              <a:ext uri="{28A0092B-C50C-407E-A947-70E740481C1C}">
-                <a14:useLocalDpi xmlns:a14="http://schemas.microsoft.com/office/drawing/2010/main" val="0"/>
-              </a:ext>
-            </a:extLst>
-          </a:blip>
-          <a:srcRect l="69227" t="33418" r="20112" b="50548"/>
-          <a:stretch/>
-        </p:blipFill>
-        <p:spPr>
-          <a:xfrm>
-            <a:off x="15579524" y="7544693"/>
-            <a:ext cx="2708477" cy="2987579"/>
-          </a:xfrm>
-          <a:prstGeom prst="rect">
-            <a:avLst/>
-          </a:prstGeom>
-        </p:spPr>
-      </p:pic>
-      <p:sp>
-        <p:nvSpPr>
-          <p:cNvPr id="3" name="TextBox 2">
-            <a:extLst>
-              <a:ext uri="{FF2B5EF4-FFF2-40B4-BE49-F238E27FC236}">
-                <a16:creationId xmlns:a16="http://schemas.microsoft.com/office/drawing/2014/main" id="{74B1D248-3DA4-EF63-972E-3DC8117D97E9}"/>
-              </a:ext>
-            </a:extLst>
-          </p:cNvPr>
-          <p:cNvSpPr txBox="1"/>
-          <p:nvPr/>
-        </p:nvSpPr>
-        <p:spPr>
-          <a:xfrm>
-            <a:off x="260431" y="329879"/>
-            <a:ext cx="8906720" cy="4978671"/>
-          </a:xfrm>
-          <a:prstGeom prst="rect">
-            <a:avLst/>
-          </a:prstGeom>
-          <a:noFill/>
-        </p:spPr>
-        <p:txBody>
-          <a:bodyPr wrap="square" rtlCol="0">
-            <a:spAutoFit/>
-          </a:bodyPr>
-          <a:lstStyle/>
-          <a:p>
-            <a:r>
-              <a:rPr lang="en-US" sz="6000" b="1" dirty="0">
-                <a:solidFill>
-                  <a:srgbClr val="CF3338"/>
-                </a:solidFill>
-                <a:latin typeface="Pragmatica" panose="020B0403040502020204" pitchFamily="34" charset="0"/>
-              </a:rPr>
-              <a:t>Office Scripts + Power Automate, part 1</a:t>
-            </a:r>
-          </a:p>
-          <a:p>
-            <a:pPr marL="142875">
-              <a:lnSpc>
-                <a:spcPct val="115000"/>
-              </a:lnSpc>
-              <a:spcBef>
-                <a:spcPts val="1125"/>
-              </a:spcBef>
-              <a:buClr>
-                <a:srgbClr val="C00000"/>
-              </a:buClr>
-              <a:buSzPts val="2100"/>
-            </a:pPr>
-            <a:endParaRPr lang="en-US" sz="4200" dirty="0">
-              <a:solidFill>
-                <a:srgbClr val="CF3338"/>
-              </a:solidFill>
-              <a:latin typeface="Pragmatica" panose="020B0403040502020204" pitchFamily="34" charset="0"/>
-              <a:sym typeface="Consolas"/>
-            </a:endParaRPr>
-          </a:p>
-          <a:p>
-            <a:pPr marL="714375" indent="-571500">
-              <a:lnSpc>
-                <a:spcPct val="115000"/>
-              </a:lnSpc>
-              <a:spcBef>
-                <a:spcPts val="1125"/>
-              </a:spcBef>
-              <a:buClr>
-                <a:srgbClr val="C00000"/>
-              </a:buClr>
-              <a:buSzPts val="2100"/>
-              <a:buFont typeface="Arial" panose="020B0604020202020204" pitchFamily="34" charset="0"/>
-              <a:buChar char="•"/>
-            </a:pPr>
-            <a:r>
-              <a:rPr lang="en-US" sz="3600" dirty="0">
-                <a:solidFill>
-                  <a:srgbClr val="C00000"/>
-                </a:solidFill>
-                <a:latin typeface="Pragmatica" panose="020B0403040502020204"/>
-                <a:sym typeface="Consolas"/>
-              </a:rPr>
-              <a:t>Run a TOC updater script on schedule</a:t>
-            </a:r>
-          </a:p>
-          <a:p>
-            <a:pPr marL="142875">
-              <a:lnSpc>
-                <a:spcPct val="115000"/>
-              </a:lnSpc>
-              <a:spcBef>
-                <a:spcPts val="1125"/>
-              </a:spcBef>
-              <a:buClr>
-                <a:srgbClr val="C00000"/>
-              </a:buClr>
-              <a:buSzPts val="2100"/>
-            </a:pPr>
-            <a:r>
-              <a:rPr lang="en-US" sz="3600" dirty="0">
-                <a:solidFill>
-                  <a:srgbClr val="C00000"/>
-                </a:solidFill>
-                <a:latin typeface="Pragmatica" panose="020B0403040502020204"/>
-                <a:sym typeface="Consolas"/>
-              </a:rPr>
-              <a:t>Files: </a:t>
-            </a:r>
-            <a:r>
-              <a:rPr lang="en-US" sz="3600" dirty="0">
-                <a:solidFill>
-                  <a:srgbClr val="C00000"/>
-                </a:solidFill>
-                <a:latin typeface="Consolas" panose="020B0609020204030204" pitchFamily="49" charset="0"/>
-                <a:sym typeface="Consolas"/>
-              </a:rPr>
-              <a:t>power-automate-office-scripts.xlsx</a:t>
-            </a:r>
-            <a:r>
-              <a:rPr lang="en-US" sz="3600" dirty="0">
-                <a:solidFill>
-                  <a:srgbClr val="C00000"/>
-                </a:solidFill>
-                <a:latin typeface="Pragmatica" panose="020B0403040502020204"/>
-                <a:sym typeface="Consolas"/>
-              </a:rPr>
-              <a:t>, </a:t>
-            </a:r>
-            <a:r>
-              <a:rPr lang="en-US" sz="3600" dirty="0">
-                <a:solidFill>
-                  <a:srgbClr val="C00000"/>
-                </a:solidFill>
-                <a:latin typeface="Consolas" panose="020B0609020204030204" pitchFamily="49" charset="0"/>
-                <a:sym typeface="Consolas"/>
-              </a:rPr>
-              <a:t>add-toc.txt</a:t>
-            </a:r>
-          </a:p>
-        </p:txBody>
-      </p:sp>
-    </p:spTree>
-    <p:extLst>
-      <p:ext uri="{BB962C8B-B14F-4D97-AF65-F5344CB8AC3E}">
-        <p14:creationId xmlns:p14="http://schemas.microsoft.com/office/powerpoint/2010/main" val="2311970800"/>
-      </p:ext>
-    </p:extLst>
-  </p:cSld>
-  <p:clrMapOvr>
-    <a:masterClrMapping/>
-  </p:clrMapOvr>
-</p:sld>
-</file>
-
-<file path=ppt/slides/slide6.xml><?xml version="1.0" encoding="utf-8"?>
-<p:sld xmlns:a="http://schemas.openxmlformats.org/drawingml/2006/main" xmlns:r="http://schemas.openxmlformats.org/officeDocument/2006/relationships" xmlns:p="http://schemas.openxmlformats.org/presentationml/2006/main">
-  <p:cSld>
-    <p:spTree>
-      <p:nvGrpSpPr>
-        <p:cNvPr id="1" name="">
-          <a:extLst>
-            <a:ext uri="{FF2B5EF4-FFF2-40B4-BE49-F238E27FC236}">
-              <a16:creationId xmlns:a16="http://schemas.microsoft.com/office/drawing/2014/main" id="{764F59BA-0C2F-2749-8CB4-7E6DE8743692}"/>
-            </a:ext>
-          </a:extLst>
-        </p:cNvPr>
-        <p:cNvGrpSpPr/>
-        <p:nvPr/>
-      </p:nvGrpSpPr>
-      <p:grpSpPr>
-        <a:xfrm>
-          <a:off x="0" y="0"/>
-          <a:ext cx="0" cy="0"/>
-          <a:chOff x="0" y="0"/>
-          <a:chExt cx="0" cy="0"/>
-        </a:xfrm>
-      </p:grpSpPr>
-      <p:sp>
-        <p:nvSpPr>
-          <p:cNvPr id="4" name="Rectangle 3">
-            <a:extLst>
-              <a:ext uri="{FF2B5EF4-FFF2-40B4-BE49-F238E27FC236}">
-                <a16:creationId xmlns:a16="http://schemas.microsoft.com/office/drawing/2014/main" id="{B454C4F1-8816-5B7C-5A36-487DF1D2DC2B}"/>
-              </a:ext>
-            </a:extLst>
-          </p:cNvPr>
-          <p:cNvSpPr/>
-          <p:nvPr/>
-        </p:nvSpPr>
-        <p:spPr>
-          <a:xfrm>
-            <a:off x="9861630" y="0"/>
-            <a:ext cx="8426370" cy="10287000"/>
-          </a:xfrm>
-          <a:prstGeom prst="rect">
-            <a:avLst/>
-          </a:prstGeom>
-          <a:solidFill>
-            <a:srgbClr val="CF3338"/>
-          </a:solidFill>
-          <a:ln>
-            <a:noFill/>
-          </a:ln>
-        </p:spPr>
-        <p:style>
-          <a:lnRef idx="2">
-            <a:schemeClr val="accent1">
-              <a:shade val="50000"/>
-            </a:schemeClr>
-          </a:lnRef>
-          <a:fillRef idx="1">
-            <a:schemeClr val="accent1"/>
-          </a:fillRef>
-          <a:effectRef idx="0">
-            <a:schemeClr val="accent1"/>
-          </a:effectRef>
-          <a:fontRef idx="minor">
-            <a:schemeClr val="lt1"/>
-          </a:fontRef>
-        </p:style>
-        <p:txBody>
-          <a:bodyPr rtlCol="0" anchor="ctr"/>
-          <a:lstStyle/>
-          <a:p>
-            <a:pPr algn="ctr"/>
-            <a:endParaRPr lang="en-US" sz="2700"/>
-          </a:p>
-        </p:txBody>
-      </p:sp>
-      <p:pic>
-        <p:nvPicPr>
-          <p:cNvPr id="2" name="Picture 1">
-            <a:extLst>
-              <a:ext uri="{FF2B5EF4-FFF2-40B4-BE49-F238E27FC236}">
-                <a16:creationId xmlns:a16="http://schemas.microsoft.com/office/drawing/2014/main" id="{8FD33BFB-92A5-B8BE-BE2A-90100EC88BE0}"/>
-              </a:ext>
-            </a:extLst>
-          </p:cNvPr>
-          <p:cNvPicPr>
-            <a:picLocks noChangeAspect="1"/>
-          </p:cNvPicPr>
-          <p:nvPr/>
-        </p:nvPicPr>
-        <p:blipFill rotWithShape="1">
-          <a:blip r:embed="rId3">
-            <a:extLst>
-              <a:ext uri="{28A0092B-C50C-407E-A947-70E740481C1C}">
-                <a14:useLocalDpi xmlns:a14="http://schemas.microsoft.com/office/drawing/2010/main" val="0"/>
-              </a:ext>
-            </a:extLst>
-          </a:blip>
-          <a:srcRect l="69227" t="33418" r="20112" b="50548"/>
-          <a:stretch/>
-        </p:blipFill>
-        <p:spPr>
-          <a:xfrm>
-            <a:off x="15579524" y="7544693"/>
-            <a:ext cx="2708477" cy="2987579"/>
-          </a:xfrm>
-          <a:prstGeom prst="rect">
-            <a:avLst/>
-          </a:prstGeom>
-        </p:spPr>
-      </p:pic>
-      <p:sp>
-        <p:nvSpPr>
-          <p:cNvPr id="3" name="TextBox 2">
-            <a:extLst>
-              <a:ext uri="{FF2B5EF4-FFF2-40B4-BE49-F238E27FC236}">
-                <a16:creationId xmlns:a16="http://schemas.microsoft.com/office/drawing/2014/main" id="{DB60F8A7-E120-24F7-0163-56AAE5565745}"/>
-              </a:ext>
-            </a:extLst>
-          </p:cNvPr>
-          <p:cNvSpPr txBox="1"/>
-          <p:nvPr/>
-        </p:nvSpPr>
-        <p:spPr>
-          <a:xfrm>
-            <a:off x="260431" y="329879"/>
-            <a:ext cx="8906720" cy="5756832"/>
-          </a:xfrm>
-          <a:prstGeom prst="rect">
-            <a:avLst/>
-          </a:prstGeom>
-          <a:noFill/>
-        </p:spPr>
-        <p:txBody>
-          <a:bodyPr wrap="square" rtlCol="0">
-            <a:spAutoFit/>
-          </a:bodyPr>
-          <a:lstStyle/>
-          <a:p>
-            <a:r>
-              <a:rPr lang="en-US" sz="6000" b="1" dirty="0">
-                <a:solidFill>
-                  <a:srgbClr val="CF3338"/>
-                </a:solidFill>
-                <a:latin typeface="Pragmatica" panose="020B0403040502020204" pitchFamily="34" charset="0"/>
-              </a:rPr>
-              <a:t>Office Scripts + Power Automate, part 2</a:t>
-            </a:r>
-          </a:p>
-          <a:p>
-            <a:pPr marL="142875">
-              <a:lnSpc>
-                <a:spcPct val="115000"/>
-              </a:lnSpc>
-              <a:spcBef>
-                <a:spcPts val="1125"/>
-              </a:spcBef>
-              <a:buClr>
-                <a:srgbClr val="C00000"/>
-              </a:buClr>
-              <a:buSzPts val="2100"/>
-            </a:pPr>
-            <a:endParaRPr lang="en-US" sz="4200" dirty="0">
-              <a:solidFill>
-                <a:srgbClr val="CF3338"/>
-              </a:solidFill>
-              <a:latin typeface="Pragmatica" panose="020B0403040502020204" pitchFamily="34" charset="0"/>
-              <a:sym typeface="Consolas"/>
-            </a:endParaRPr>
-          </a:p>
-          <a:p>
-            <a:pPr marL="714375" indent="-571500">
-              <a:lnSpc>
-                <a:spcPct val="115000"/>
-              </a:lnSpc>
-              <a:spcBef>
-                <a:spcPts val="1125"/>
-              </a:spcBef>
-              <a:buClr>
-                <a:srgbClr val="C00000"/>
-              </a:buClr>
-              <a:buSzPts val="2100"/>
-              <a:buFont typeface="Arial" panose="020B0604020202020204" pitchFamily="34" charset="0"/>
-              <a:buChar char="•"/>
-            </a:pPr>
-            <a:r>
-              <a:rPr lang="en-US" sz="3600" dirty="0">
-                <a:solidFill>
-                  <a:srgbClr val="C00000"/>
-                </a:solidFill>
-                <a:latin typeface="Pragmatica" panose="020B0403040502020204"/>
-                <a:sym typeface="Consolas"/>
-              </a:rPr>
-              <a:t>How can we apply the same script to multiple workbooks? </a:t>
-            </a:r>
-          </a:p>
-          <a:p>
-            <a:pPr marL="714375" indent="-571500">
-              <a:lnSpc>
-                <a:spcPct val="115000"/>
-              </a:lnSpc>
-              <a:spcBef>
-                <a:spcPts val="1125"/>
-              </a:spcBef>
-              <a:buClr>
-                <a:srgbClr val="C00000"/>
-              </a:buClr>
-              <a:buSzPts val="2100"/>
-              <a:buFont typeface="Arial" panose="020B0604020202020204" pitchFamily="34" charset="0"/>
-              <a:buChar char="•"/>
-            </a:pPr>
-            <a:r>
-              <a:rPr lang="en-US" sz="3600" dirty="0">
-                <a:solidFill>
-                  <a:srgbClr val="C00000"/>
-                </a:solidFill>
-                <a:latin typeface="Pragmatica" panose="020B0403040502020204"/>
-                <a:sym typeface="Consolas"/>
-              </a:rPr>
-              <a:t>Use conditional logic to validate filetype</a:t>
-            </a:r>
-          </a:p>
-          <a:p>
-            <a:pPr marL="142875">
-              <a:lnSpc>
-                <a:spcPct val="115000"/>
-              </a:lnSpc>
-              <a:spcBef>
-                <a:spcPts val="1125"/>
-              </a:spcBef>
-              <a:buClr>
-                <a:srgbClr val="C00000"/>
-              </a:buClr>
-              <a:buSzPts val="2100"/>
-            </a:pPr>
-            <a:r>
-              <a:rPr lang="en-US" sz="3600" dirty="0">
-                <a:solidFill>
-                  <a:srgbClr val="C00000"/>
-                </a:solidFill>
-                <a:latin typeface="Pragmatica" panose="020B0403040502020204"/>
-                <a:sym typeface="Consolas"/>
-              </a:rPr>
-              <a:t>Folder: </a:t>
-            </a:r>
-            <a:r>
-              <a:rPr lang="en-US" sz="3600" dirty="0">
-                <a:solidFill>
-                  <a:srgbClr val="C00000"/>
-                </a:solidFill>
-                <a:latin typeface="Consolas" panose="020B0609020204030204" pitchFamily="49" charset="0"/>
-                <a:sym typeface="Consolas"/>
-              </a:rPr>
-              <a:t>multiple-workbooks</a:t>
-            </a:r>
-          </a:p>
-        </p:txBody>
-      </p:sp>
-    </p:spTree>
-    <p:extLst>
-      <p:ext uri="{BB962C8B-B14F-4D97-AF65-F5344CB8AC3E}">
-        <p14:creationId xmlns:p14="http://schemas.microsoft.com/office/powerpoint/2010/main" val="4221522694"/>
-      </p:ext>
-    </p:extLst>
-  </p:cSld>
-  <p:clrMapOvr>
-    <a:masterClrMapping/>
-  </p:clrMapOvr>
-</p:sld>
-</file>
-
-<file path=ppt/slides/slide7.xml><?xml version="1.0" encoding="utf-8"?>
-<p:sld xmlns:a="http://schemas.openxmlformats.org/drawingml/2006/main" xmlns:r="http://schemas.openxmlformats.org/officeDocument/2006/relationships" xmlns:p="http://schemas.openxmlformats.org/presentationml/2006/main">
-  <p:cSld>
-    <p:spTree>
-      <p:nvGrpSpPr>
-        <p:cNvPr id="1" name="">
-          <a:extLst>
-            <a:ext uri="{FF2B5EF4-FFF2-40B4-BE49-F238E27FC236}">
-              <a16:creationId xmlns:a16="http://schemas.microsoft.com/office/drawing/2014/main" id="{D687E3AC-4FA3-83DA-F79F-26551AD8550C}"/>
-            </a:ext>
-          </a:extLst>
-        </p:cNvPr>
-        <p:cNvGrpSpPr/>
-        <p:nvPr/>
-      </p:nvGrpSpPr>
-      <p:grpSpPr>
-        <a:xfrm>
-          <a:off x="0" y="0"/>
-          <a:ext cx="0" cy="0"/>
-          <a:chOff x="0" y="0"/>
-          <a:chExt cx="0" cy="0"/>
-        </a:xfrm>
-      </p:grpSpPr>
-      <p:sp>
-        <p:nvSpPr>
-          <p:cNvPr id="11" name="TextBox 10">
-            <a:extLst>
-              <a:ext uri="{FF2B5EF4-FFF2-40B4-BE49-F238E27FC236}">
-                <a16:creationId xmlns:a16="http://schemas.microsoft.com/office/drawing/2014/main" id="{FFF83F61-9347-B3FC-96FC-70DF3E10AC66}"/>
-              </a:ext>
-            </a:extLst>
-          </p:cNvPr>
-          <p:cNvSpPr txBox="1"/>
-          <p:nvPr/>
-        </p:nvSpPr>
-        <p:spPr>
-          <a:xfrm>
-            <a:off x="520861" y="170082"/>
-            <a:ext cx="14642939" cy="1477328"/>
-          </a:xfrm>
-          <a:prstGeom prst="rect">
-            <a:avLst/>
-          </a:prstGeom>
-          <a:noFill/>
-        </p:spPr>
-        <p:txBody>
-          <a:bodyPr wrap="square" rtlCol="0">
-            <a:spAutoFit/>
-          </a:bodyPr>
-          <a:lstStyle/>
-          <a:p>
-            <a:r>
-              <a:rPr lang="en-US" sz="9000" dirty="0">
-                <a:latin typeface="Aliens &amp; cows" panose="00000500000000000000" pitchFamily="2" charset="0"/>
-              </a:rPr>
-              <a:t>So what for AI?</a:t>
-            </a:r>
-          </a:p>
-        </p:txBody>
-      </p:sp>
-      <p:sp>
-        <p:nvSpPr>
-          <p:cNvPr id="3" name="TextBox 2">
-            <a:extLst>
-              <a:ext uri="{FF2B5EF4-FFF2-40B4-BE49-F238E27FC236}">
-                <a16:creationId xmlns:a16="http://schemas.microsoft.com/office/drawing/2014/main" id="{7A23AEB3-4E11-C3D4-E894-27B00448C33C}"/>
-              </a:ext>
-            </a:extLst>
-          </p:cNvPr>
-          <p:cNvSpPr txBox="1"/>
-          <p:nvPr/>
-        </p:nvSpPr>
-        <p:spPr>
-          <a:xfrm>
-            <a:off x="520861" y="2095500"/>
-            <a:ext cx="14393120" cy="6740307"/>
-          </a:xfrm>
-          <a:prstGeom prst="rect">
-            <a:avLst/>
-          </a:prstGeom>
-          <a:noFill/>
-        </p:spPr>
-        <p:txBody>
-          <a:bodyPr wrap="square" rtlCol="0">
-            <a:spAutoFit/>
-          </a:bodyPr>
-          <a:lstStyle/>
-          <a:p>
-            <a:pPr marL="685800" indent="-685800">
-              <a:buClr>
-                <a:srgbClr val="CF3338"/>
-              </a:buClr>
-              <a:buFont typeface="Arial" panose="020B0604020202020204" pitchFamily="34" charset="0"/>
-              <a:buChar char="•"/>
-            </a:pPr>
-            <a:r>
-              <a:rPr lang="en-US" sz="5400" dirty="0">
-                <a:solidFill>
-                  <a:srgbClr val="707070"/>
-                </a:solidFill>
-                <a:latin typeface="Pragmatica" panose="020B0403040502020204" pitchFamily="34" charset="0"/>
-              </a:rPr>
-              <a:t>AI gives insights: Scripts + Flows make them happen</a:t>
-            </a:r>
-          </a:p>
-          <a:p>
-            <a:pPr marL="685800" indent="-685800">
-              <a:buClr>
-                <a:srgbClr val="CF3338"/>
-              </a:buClr>
-              <a:buFont typeface="Arial" panose="020B0604020202020204" pitchFamily="34" charset="0"/>
-              <a:buChar char="•"/>
-            </a:pPr>
-            <a:r>
-              <a:rPr lang="en-US" sz="5400" dirty="0">
-                <a:solidFill>
-                  <a:srgbClr val="707070"/>
-                </a:solidFill>
-                <a:latin typeface="Pragmatica" panose="020B0403040502020204" pitchFamily="34" charset="0"/>
-              </a:rPr>
-              <a:t>Turns AI-generated logic into repeatable, scheduled workflows</a:t>
-            </a:r>
-          </a:p>
-          <a:p>
-            <a:pPr marL="685800" indent="-685800">
-              <a:buClr>
-                <a:srgbClr val="CF3338"/>
-              </a:buClr>
-              <a:buFont typeface="Arial" panose="020B0604020202020204" pitchFamily="34" charset="0"/>
-              <a:buChar char="•"/>
-            </a:pPr>
-            <a:r>
-              <a:rPr lang="en-US" sz="5400" dirty="0">
-                <a:solidFill>
-                  <a:srgbClr val="707070"/>
-                </a:solidFill>
-                <a:latin typeface="Pragmatica" panose="020B0403040502020204" pitchFamily="34" charset="0"/>
-              </a:rPr>
-              <a:t>Gives Copilot a place to hand off real work (refresh, clean, notify) </a:t>
-            </a:r>
-          </a:p>
-          <a:p>
-            <a:pPr marL="685800" indent="-685800">
-              <a:buClr>
-                <a:srgbClr val="CF3338"/>
-              </a:buClr>
-              <a:buFont typeface="Arial" panose="020B0604020202020204" pitchFamily="34" charset="0"/>
-              <a:buChar char="•"/>
-            </a:pPr>
-            <a:r>
-              <a:rPr lang="en-US" sz="5400" dirty="0">
-                <a:solidFill>
-                  <a:srgbClr val="707070"/>
-                </a:solidFill>
-                <a:latin typeface="Pragmatica" panose="020B0403040502020204" pitchFamily="34" charset="0"/>
-              </a:rPr>
-              <a:t>Builds the “execution layer” of the Modern Excel AI Stack.</a:t>
-            </a:r>
-          </a:p>
-        </p:txBody>
-      </p:sp>
-      <p:pic>
-        <p:nvPicPr>
-          <p:cNvPr id="15" name="Picture 14" descr="A close up of a sign&#10;&#10;Description automatically generated">
-            <a:extLst>
-              <a:ext uri="{FF2B5EF4-FFF2-40B4-BE49-F238E27FC236}">
-                <a16:creationId xmlns:a16="http://schemas.microsoft.com/office/drawing/2014/main" id="{96DC29E9-117A-CF3F-ECBD-08964AD5B8F2}"/>
-              </a:ext>
-            </a:extLst>
-          </p:cNvPr>
-          <p:cNvPicPr>
-            <a:picLocks noChangeAspect="1"/>
-          </p:cNvPicPr>
-          <p:nvPr/>
-        </p:nvPicPr>
-        <p:blipFill>
-          <a:blip r:embed="rId3">
-            <a:extLst>
-              <a:ext uri="{28A0092B-C50C-407E-A947-70E740481C1C}">
-                <a14:useLocalDpi xmlns:a14="http://schemas.microsoft.com/office/drawing/2010/main" val="0"/>
-              </a:ext>
-            </a:extLst>
-          </a:blip>
-          <a:stretch>
-            <a:fillRect/>
-          </a:stretch>
-        </p:blipFill>
-        <p:spPr>
-          <a:xfrm>
-            <a:off x="16341036" y="8058429"/>
-            <a:ext cx="1942857" cy="2228571"/>
-          </a:xfrm>
-          <a:prstGeom prst="rect">
-            <a:avLst/>
-          </a:prstGeom>
-        </p:spPr>
-      </p:pic>
-    </p:spTree>
-    <p:extLst>
-      <p:ext uri="{BB962C8B-B14F-4D97-AF65-F5344CB8AC3E}">
-        <p14:creationId xmlns:p14="http://schemas.microsoft.com/office/powerpoint/2010/main" val="43337917"/>
-      </p:ext>
-    </p:extLst>
-  </p:cSld>
-  <p:clrMapOvr>
-    <a:masterClrMapping/>
-  </p:clrMapOvr>
-</p:sld>
-</file>
-
-<file path=ppt/slides/slide8.xml><?xml version="1.0" encoding="utf-8"?>
-<p:sld xmlns:a="http://schemas.openxmlformats.org/drawingml/2006/main" xmlns:r="http://schemas.openxmlformats.org/officeDocument/2006/relationships" xmlns:p="http://schemas.openxmlformats.org/presentationml/2006/main">
-  <p:cSld>
-    <p:spTree>
-      <p:nvGrpSpPr>
-        <p:cNvPr id="1" name="">
-          <a:extLst>
-            <a:ext uri="{FF2B5EF4-FFF2-40B4-BE49-F238E27FC236}">
-              <a16:creationId xmlns:a16="http://schemas.microsoft.com/office/drawing/2014/main" id="{E7B78ECD-3650-0D5D-E084-2ADF90776325}"/>
-            </a:ext>
-          </a:extLst>
-        </p:cNvPr>
-        <p:cNvGrpSpPr/>
-        <p:nvPr/>
-      </p:nvGrpSpPr>
-      <p:grpSpPr>
-        <a:xfrm>
-          <a:off x="0" y="0"/>
-          <a:ext cx="0" cy="0"/>
-          <a:chOff x="0" y="0"/>
-          <a:chExt cx="0" cy="0"/>
-        </a:xfrm>
-      </p:grpSpPr>
-      <p:sp>
-        <p:nvSpPr>
-          <p:cNvPr id="11" name="TextBox 10">
-            <a:extLst>
-              <a:ext uri="{FF2B5EF4-FFF2-40B4-BE49-F238E27FC236}">
-                <a16:creationId xmlns:a16="http://schemas.microsoft.com/office/drawing/2014/main" id="{2BF29A83-0331-0E10-824A-4833E4760B19}"/>
-              </a:ext>
-            </a:extLst>
-          </p:cNvPr>
-          <p:cNvSpPr txBox="1"/>
-          <p:nvPr/>
-        </p:nvSpPr>
-        <p:spPr>
-          <a:xfrm>
-            <a:off x="520861" y="170082"/>
-            <a:ext cx="16700339" cy="1107996"/>
-          </a:xfrm>
-          <a:prstGeom prst="rect">
-            <a:avLst/>
-          </a:prstGeom>
-          <a:noFill/>
-        </p:spPr>
-        <p:txBody>
-          <a:bodyPr wrap="square" rtlCol="0">
-            <a:spAutoFit/>
-          </a:bodyPr>
-          <a:lstStyle/>
-          <a:p>
-            <a:r>
-              <a:rPr lang="en-US" sz="6600" dirty="0">
-                <a:latin typeface="Aliens &amp; cows" panose="00000500000000000000" pitchFamily="2" charset="0"/>
-              </a:rPr>
-              <a:t>Day 5 preview: The intelligence layer with Excel</a:t>
-            </a:r>
-          </a:p>
-        </p:txBody>
-      </p:sp>
-      <p:sp>
-        <p:nvSpPr>
-          <p:cNvPr id="3" name="TextBox 2">
-            <a:extLst>
-              <a:ext uri="{FF2B5EF4-FFF2-40B4-BE49-F238E27FC236}">
-                <a16:creationId xmlns:a16="http://schemas.microsoft.com/office/drawing/2014/main" id="{1F8BFEA8-EC1E-D186-8530-6533D3345701}"/>
-              </a:ext>
-            </a:extLst>
-          </p:cNvPr>
-          <p:cNvSpPr txBox="1"/>
-          <p:nvPr/>
-        </p:nvSpPr>
-        <p:spPr>
-          <a:xfrm>
-            <a:off x="520861" y="2095500"/>
-            <a:ext cx="14393120" cy="6740307"/>
-          </a:xfrm>
-          <a:prstGeom prst="rect">
-            <a:avLst/>
-          </a:prstGeom>
-          <a:noFill/>
-        </p:spPr>
-        <p:txBody>
-          <a:bodyPr wrap="square" rtlCol="0">
-            <a:spAutoFit/>
-          </a:bodyPr>
-          <a:lstStyle/>
-          <a:p>
-            <a:pPr marL="685800" indent="-685800">
-              <a:buClr>
-                <a:srgbClr val="CF3338"/>
-              </a:buClr>
-              <a:buFont typeface="Arial" panose="020B0604020202020204" pitchFamily="34" charset="0"/>
-              <a:buChar char="•"/>
-            </a:pPr>
-            <a:r>
-              <a:rPr lang="en-US" sz="5400" dirty="0">
-                <a:solidFill>
-                  <a:srgbClr val="707070"/>
-                </a:solidFill>
-                <a:latin typeface="Pragmatica" panose="020B0403040502020204" pitchFamily="34" charset="0"/>
-              </a:rPr>
-              <a:t>Build your own Copilot for your team or department.</a:t>
-            </a:r>
-          </a:p>
-          <a:p>
-            <a:pPr marL="685800" indent="-685800">
-              <a:buClr>
-                <a:srgbClr val="CF3338"/>
-              </a:buClr>
-              <a:buFont typeface="Arial" panose="020B0604020202020204" pitchFamily="34" charset="0"/>
-              <a:buChar char="•"/>
-            </a:pPr>
-            <a:r>
-              <a:rPr lang="en-US" sz="5400" dirty="0">
-                <a:solidFill>
-                  <a:srgbClr val="707070"/>
-                </a:solidFill>
-                <a:latin typeface="Pragmatica" panose="020B0403040502020204" pitchFamily="34" charset="0"/>
-              </a:rPr>
-              <a:t>Connect it to Excel, Power Automate, Teams, and your data.</a:t>
-            </a:r>
-          </a:p>
-          <a:p>
-            <a:pPr marL="685800" indent="-685800">
-              <a:buClr>
-                <a:srgbClr val="CF3338"/>
-              </a:buClr>
-              <a:buFont typeface="Arial" panose="020B0604020202020204" pitchFamily="34" charset="0"/>
-              <a:buChar char="•"/>
-            </a:pPr>
-            <a:r>
-              <a:rPr lang="en-US" sz="5400" dirty="0">
-                <a:solidFill>
-                  <a:srgbClr val="707070"/>
-                </a:solidFill>
-                <a:latin typeface="Pragmatica" panose="020B0403040502020204" pitchFamily="34" charset="0"/>
-              </a:rPr>
-              <a:t>See how your Scripts + Flows become actions your Copilot can call.</a:t>
-            </a:r>
-          </a:p>
-          <a:p>
-            <a:pPr marL="685800" indent="-685800">
-              <a:buClr>
-                <a:srgbClr val="CF3338"/>
-              </a:buClr>
-              <a:buFont typeface="Arial" panose="020B0604020202020204" pitchFamily="34" charset="0"/>
-              <a:buChar char="•"/>
-            </a:pPr>
-            <a:r>
-              <a:rPr lang="en-US" sz="5400" dirty="0">
-                <a:solidFill>
-                  <a:srgbClr val="707070"/>
-                </a:solidFill>
-                <a:latin typeface="Pragmatica" panose="020B0403040502020204" pitchFamily="34" charset="0"/>
-              </a:rPr>
-              <a:t>Learn the orchestration layer, where AI starts coordinating your whole workflow.</a:t>
-            </a:r>
-          </a:p>
-        </p:txBody>
-      </p:sp>
-      <p:pic>
-        <p:nvPicPr>
-          <p:cNvPr id="15" name="Picture 14" descr="A close up of a sign&#10;&#10;Description automatically generated">
-            <a:extLst>
-              <a:ext uri="{FF2B5EF4-FFF2-40B4-BE49-F238E27FC236}">
-                <a16:creationId xmlns:a16="http://schemas.microsoft.com/office/drawing/2014/main" id="{49376407-AE9F-CCBA-4232-9DA21ADE632E}"/>
-              </a:ext>
-            </a:extLst>
-          </p:cNvPr>
-          <p:cNvPicPr>
-            <a:picLocks noChangeAspect="1"/>
-          </p:cNvPicPr>
-          <p:nvPr/>
-        </p:nvPicPr>
-        <p:blipFill>
-          <a:blip r:embed="rId3">
-            <a:extLst>
-              <a:ext uri="{28A0092B-C50C-407E-A947-70E740481C1C}">
-                <a14:useLocalDpi xmlns:a14="http://schemas.microsoft.com/office/drawing/2010/main" val="0"/>
-              </a:ext>
-            </a:extLst>
-          </a:blip>
-          <a:stretch>
-            <a:fillRect/>
-          </a:stretch>
-        </p:blipFill>
-        <p:spPr>
-          <a:xfrm>
-            <a:off x="16341036" y="8058429"/>
-            <a:ext cx="1942857" cy="2228571"/>
-          </a:xfrm>
-          <a:prstGeom prst="rect">
-            <a:avLst/>
-          </a:prstGeom>
-        </p:spPr>
-      </p:pic>
-    </p:spTree>
-    <p:extLst>
-      <p:ext uri="{BB962C8B-B14F-4D97-AF65-F5344CB8AC3E}">
-        <p14:creationId xmlns:p14="http://schemas.microsoft.com/office/powerpoint/2010/main" val="2946292221"/>
-      </p:ext>
-    </p:extLst>
-  </p:cSld>
-  <p:clrMapOvr>
-    <a:masterClrMapping/>
-  </p:clrMapOvr>
-</p:sld>
-</file>
-
-<file path=ppt/slides/slide9.xml><?xml version="1.0" encoding="utf-8"?>
-<p:sld xmlns:a="http://schemas.openxmlformats.org/drawingml/2006/main" xmlns:r="http://schemas.openxmlformats.org/officeDocument/2006/relationships" xmlns:p="http://schemas.openxmlformats.org/presentationml/2006/main">
-  <p:cSld>
-    <p:spTree>
-      <p:nvGrpSpPr>
-        <p:cNvPr id="1" name=""/>
-        <p:cNvGrpSpPr/>
-        <p:nvPr/>
-      </p:nvGrpSpPr>
-      <p:grpSpPr>
-        <a:xfrm>
-          <a:off x="0" y="0"/>
-          <a:ext cx="0" cy="0"/>
-          <a:chOff x="0" y="0"/>
-          <a:chExt cx="0" cy="0"/>
-        </a:xfrm>
-      </p:grpSpPr>
-      <p:pic>
-        <p:nvPicPr>
-          <p:cNvPr id="10" name="Picture 9"/>
-          <p:cNvPicPr>
-            <a:picLocks noChangeAspect="1"/>
-          </p:cNvPicPr>
-          <p:nvPr/>
-        </p:nvPicPr>
-        <p:blipFill rotWithShape="1">
-          <a:blip r:embed="rId2">
-            <a:extLst>
-              <a:ext uri="{28A0092B-C50C-407E-A947-70E740481C1C}">
-                <a14:useLocalDpi xmlns:a14="http://schemas.microsoft.com/office/drawing/2010/main" val="0"/>
-              </a:ext>
-            </a:extLst>
-          </a:blip>
-          <a:srcRect l="50728" t="56371"/>
-          <a:stretch/>
-        </p:blipFill>
-        <p:spPr>
-          <a:xfrm>
-            <a:off x="12204691" y="3316148"/>
-            <a:ext cx="6083309" cy="6970854"/>
-          </a:xfrm>
-          <a:prstGeom prst="rect">
-            <a:avLst/>
-          </a:prstGeom>
-        </p:spPr>
-      </p:pic>
-      <p:pic>
-        <p:nvPicPr>
-          <p:cNvPr id="4" name="Picture 3"/>
-          <p:cNvPicPr>
-            <a:picLocks noChangeAspect="1"/>
-          </p:cNvPicPr>
-          <p:nvPr/>
-        </p:nvPicPr>
-        <p:blipFill>
-          <a:blip r:embed="rId3">
-            <a:extLst>
-              <a:ext uri="{28A0092B-C50C-407E-A947-70E740481C1C}">
-                <a14:useLocalDpi xmlns:a14="http://schemas.microsoft.com/office/drawing/2010/main" val="0"/>
-              </a:ext>
-            </a:extLst>
-          </a:blip>
-          <a:stretch>
-            <a:fillRect/>
-          </a:stretch>
-        </p:blipFill>
-        <p:spPr>
-          <a:xfrm>
-            <a:off x="-807744" y="-3724155"/>
-            <a:ext cx="15257208" cy="11189825"/>
-          </a:xfrm>
-          <a:prstGeom prst="rect">
-            <a:avLst/>
-          </a:prstGeom>
-        </p:spPr>
-      </p:pic>
-      <p:sp>
-        <p:nvSpPr>
-          <p:cNvPr id="11" name="TextBox 10"/>
-          <p:cNvSpPr txBox="1"/>
-          <p:nvPr/>
-        </p:nvSpPr>
-        <p:spPr>
-          <a:xfrm>
-            <a:off x="486137" y="2531318"/>
-            <a:ext cx="11979797" cy="923330"/>
-          </a:xfrm>
-          <a:prstGeom prst="rect">
-            <a:avLst/>
-          </a:prstGeom>
-          <a:noFill/>
-        </p:spPr>
-        <p:txBody>
-          <a:bodyPr wrap="square" rtlCol="0">
-            <a:spAutoFit/>
-          </a:bodyPr>
-          <a:lstStyle/>
-          <a:p>
-            <a:r>
-              <a:rPr lang="en-US" sz="5400" b="1" dirty="0">
-                <a:solidFill>
-                  <a:srgbClr val="CF3338"/>
-                </a:solidFill>
-                <a:latin typeface="Pragmatica" panose="020B0403040502020204" pitchFamily="34" charset="0"/>
-              </a:rPr>
-              <a:t>Questions?</a:t>
-            </a:r>
-          </a:p>
-        </p:txBody>
-      </p:sp>
-      <p:pic>
-        <p:nvPicPr>
-          <p:cNvPr id="5" name="Picture 4">
-            <a:extLst>
-              <a:ext uri="{FF2B5EF4-FFF2-40B4-BE49-F238E27FC236}">
-                <a16:creationId xmlns:a16="http://schemas.microsoft.com/office/drawing/2014/main" id="{54A06221-5316-4BCF-9FDA-BDB95FF4A778}"/>
-              </a:ext>
-            </a:extLst>
-          </p:cNvPr>
-          <p:cNvPicPr>
-            <a:picLocks noChangeAspect="1"/>
-          </p:cNvPicPr>
-          <p:nvPr/>
-        </p:nvPicPr>
-        <p:blipFill>
-          <a:blip r:embed="rId4">
-            <a:extLst>
-              <a:ext uri="{28A0092B-C50C-407E-A947-70E740481C1C}">
-                <a14:useLocalDpi xmlns:a14="http://schemas.microsoft.com/office/drawing/2010/main" val="0"/>
-              </a:ext>
-            </a:extLst>
-          </a:blip>
-          <a:srcRect/>
-          <a:stretch/>
-        </p:blipFill>
-        <p:spPr>
-          <a:xfrm>
-            <a:off x="12204691" y="3317239"/>
-            <a:ext cx="6083309" cy="6968672"/>
-          </a:xfrm>
-          <a:prstGeom prst="rect">
-            <a:avLst/>
-          </a:prstGeom>
-        </p:spPr>
-      </p:pic>
-    </p:spTree>
-    <p:extLst>
-      <p:ext uri="{BB962C8B-B14F-4D97-AF65-F5344CB8AC3E}">
-        <p14:creationId xmlns:p14="http://schemas.microsoft.com/office/powerpoint/2010/main" val="1689860732"/>
       </p:ext>
     </p:extLst>
   </p:cSld>
